--- a/DCIM-RolesWorkflowAutomation.pptx
+++ b/DCIM-RolesWorkflowAutomation.pptx
@@ -27945,7 +27945,7 @@
             <a:effectLst/>
             <a:extLst>
               <a:ext uri="{C572A759-6A51-4108-AA02-DFA0A04FC94B}">
-                <ma14:wrappingTextBoxFlag xmlns:ma14="http://schemas.microsoft.com/office/mac/drawingml/2011/main" xmlns:a14="http://schemas.microsoft.com/office/drawing/2010/main" xmlns:m="http://schemas.openxmlformats.org/officeDocument/2006/math" xmlns="" val="1"/>
+                <ma14:wrappingTextBoxFlag xmlns="" xmlns:m="http://schemas.openxmlformats.org/officeDocument/2006/math" xmlns:a14="http://schemas.microsoft.com/office/drawing/2010/main" xmlns:ma14="http://schemas.microsoft.com/office/mac/drawingml/2011/main" val="1"/>
               </a:ext>
             </a:extLst>
           </p:spPr>
@@ -27994,7 +27994,7 @@
             <a:effectLst/>
             <a:extLst>
               <a:ext uri="{C572A759-6A51-4108-AA02-DFA0A04FC94B}">
-                <ma14:wrappingTextBoxFlag xmlns:ma14="http://schemas.microsoft.com/office/mac/drawingml/2011/main" xmlns:a14="http://schemas.microsoft.com/office/drawing/2010/main" xmlns:m="http://schemas.openxmlformats.org/officeDocument/2006/math" xmlns="" val="1"/>
+                <ma14:wrappingTextBoxFlag xmlns="" xmlns:m="http://schemas.openxmlformats.org/officeDocument/2006/math" xmlns:a14="http://schemas.microsoft.com/office/drawing/2010/main" xmlns:ma14="http://schemas.microsoft.com/office/mac/drawingml/2011/main" val="1"/>
               </a:ext>
             </a:extLst>
           </p:spPr>
@@ -28116,7 +28116,7 @@
             <a:effectLst/>
             <a:extLst>
               <a:ext uri="{C572A759-6A51-4108-AA02-DFA0A04FC94B}">
-                <ma14:wrappingTextBoxFlag xmlns:ma14="http://schemas.microsoft.com/office/mac/drawingml/2011/main" xmlns:a14="http://schemas.microsoft.com/office/drawing/2010/main" xmlns:m="http://schemas.openxmlformats.org/officeDocument/2006/math" xmlns="" val="1"/>
+                <ma14:wrappingTextBoxFlag xmlns="" xmlns:m="http://schemas.openxmlformats.org/officeDocument/2006/math" xmlns:a14="http://schemas.microsoft.com/office/drawing/2010/main" xmlns:ma14="http://schemas.microsoft.com/office/mac/drawingml/2011/main" val="1"/>
               </a:ext>
             </a:extLst>
           </p:spPr>
@@ -28234,7 +28234,7 @@
             <a:effectLst/>
             <a:extLst>
               <a:ext uri="{C572A759-6A51-4108-AA02-DFA0A04FC94B}">
-                <ma14:wrappingTextBoxFlag xmlns:ma14="http://schemas.microsoft.com/office/mac/drawingml/2011/main" xmlns:a14="http://schemas.microsoft.com/office/drawing/2010/main" xmlns:m="http://schemas.openxmlformats.org/officeDocument/2006/math" xmlns="" val="1"/>
+                <ma14:wrappingTextBoxFlag xmlns="" xmlns:m="http://schemas.openxmlformats.org/officeDocument/2006/math" xmlns:a14="http://schemas.microsoft.com/office/drawing/2010/main" xmlns:ma14="http://schemas.microsoft.com/office/mac/drawingml/2011/main" val="1"/>
               </a:ext>
             </a:extLst>
           </p:spPr>
@@ -28331,431 +28331,422 @@
           </a:p>
         </p:txBody>
       </p:sp>
-      <p:grpSp>
-        <p:nvGrpSpPr>
-          <p:cNvPr id="18" name="Group 17">
+      <p:sp>
+        <p:nvSpPr>
+          <p:cNvPr id="19" name="Circle">
             <a:extLst>
               <a:ext uri="{FF2B5EF4-FFF2-40B4-BE49-F238E27FC236}">
-                <a16:creationId xmlns:a16="http://schemas.microsoft.com/office/drawing/2014/main" id="{A70305C0-578E-4F66-835C-A070AD13DDC1}"/>
+                <a16:creationId xmlns:a16="http://schemas.microsoft.com/office/drawing/2014/main" id="{B5E651A4-7448-4B5A-ABDE-A052E8A3DA31}"/>
               </a:ext>
             </a:extLst>
           </p:cNvPr>
-          <p:cNvGrpSpPr/>
+          <p:cNvSpPr/>
           <p:nvPr/>
-        </p:nvGrpSpPr>
-        <p:grpSpPr>
+        </p:nvSpPr>
+        <p:spPr>
           <a:xfrm>
-            <a:off x="2216168" y="3229999"/>
-            <a:ext cx="3466506" cy="1947309"/>
-            <a:chOff x="3658195" y="2994111"/>
-            <a:chExt cx="3466506" cy="1947309"/>
+            <a:off x="2114995" y="4825145"/>
+            <a:ext cx="278607" cy="278607"/>
           </a:xfrm>
-        </p:grpSpPr>
-        <p:sp>
-          <p:nvSpPr>
-            <p:cNvPr id="19" name="Circle">
-              <a:extLst>
-                <a:ext uri="{FF2B5EF4-FFF2-40B4-BE49-F238E27FC236}">
-                  <a16:creationId xmlns:a16="http://schemas.microsoft.com/office/drawing/2014/main" id="{B5E651A4-7448-4B5A-ABDE-A052E8A3DA31}"/>
-                </a:ext>
-              </a:extLst>
-            </p:cNvPr>
-            <p:cNvSpPr/>
-            <p:nvPr/>
-          </p:nvSpPr>
-          <p:spPr>
-            <a:xfrm>
-              <a:off x="3658195" y="4420195"/>
-              <a:ext cx="278607" cy="278607"/>
-            </a:xfrm>
-            <a:prstGeom prst="ellipse">
-              <a:avLst/>
-            </a:prstGeom>
-            <a:solidFill>
-              <a:schemeClr val="accent1">
-                <a:lumOff val="-13575"/>
-              </a:schemeClr>
-            </a:solidFill>
-            <a:ln w="12700" cap="flat">
-              <a:noFill/>
-              <a:miter lim="400000"/>
-            </a:ln>
-            <a:effectLst/>
-          </p:spPr>
-          <p:txBody>
-            <a:bodyPr wrap="square" lIns="35719" tIns="35719" rIns="35719" bIns="35719" numCol="1" anchor="ctr">
-              <a:noAutofit/>
-            </a:bodyPr>
-            <a:lstStyle/>
-            <a:p>
-              <a:pPr>
-                <a:defRPr sz="2200" b="0">
-                  <a:solidFill>
-                    <a:srgbClr val="27FF3B"/>
-                  </a:solidFill>
-                  <a:latin typeface="+mn-lt"/>
-                  <a:ea typeface="+mn-ea"/>
-                  <a:cs typeface="+mn-cs"/>
-                  <a:sym typeface="Helvetica Neue Medium"/>
-                </a:defRPr>
-              </a:pPr>
-              <a:endParaRPr sz="1547"/>
-            </a:p>
-          </p:txBody>
-        </p:sp>
-        <p:sp>
-          <p:nvSpPr>
-            <p:cNvPr id="20" name="Circle">
-              <a:extLst>
-                <a:ext uri="{FF2B5EF4-FFF2-40B4-BE49-F238E27FC236}">
-                  <a16:creationId xmlns:a16="http://schemas.microsoft.com/office/drawing/2014/main" id="{1E120C94-34DE-4A30-B3D9-A39664CCBDB0}"/>
-                </a:ext>
-              </a:extLst>
-            </p:cNvPr>
-            <p:cNvSpPr/>
-            <p:nvPr/>
-          </p:nvSpPr>
-          <p:spPr>
-            <a:xfrm>
-              <a:off x="4104679" y="3896915"/>
-              <a:ext cx="278607" cy="278607"/>
-            </a:xfrm>
-            <a:prstGeom prst="ellipse">
-              <a:avLst/>
-            </a:prstGeom>
-            <a:solidFill>
-              <a:schemeClr val="accent1">
-                <a:lumOff val="-13575"/>
-              </a:schemeClr>
-            </a:solidFill>
-            <a:ln w="12700" cap="flat">
-              <a:noFill/>
-              <a:miter lim="400000"/>
-            </a:ln>
-            <a:effectLst/>
-          </p:spPr>
-          <p:txBody>
-            <a:bodyPr wrap="square" lIns="35719" tIns="35719" rIns="35719" bIns="35719" numCol="1" anchor="ctr">
-              <a:noAutofit/>
-            </a:bodyPr>
-            <a:lstStyle/>
-            <a:p>
-              <a:pPr>
-                <a:defRPr sz="2200" b="0">
-                  <a:solidFill>
-                    <a:srgbClr val="FFFFFF"/>
-                  </a:solidFill>
-                  <a:latin typeface="+mn-lt"/>
-                  <a:ea typeface="+mn-ea"/>
-                  <a:cs typeface="+mn-cs"/>
-                  <a:sym typeface="Helvetica Neue Medium"/>
-                </a:defRPr>
-              </a:pPr>
-              <a:endParaRPr sz="1547"/>
-            </a:p>
-          </p:txBody>
-        </p:sp>
-        <p:sp>
-          <p:nvSpPr>
-            <p:cNvPr id="21" name="Circle">
-              <a:extLst>
-                <a:ext uri="{FF2B5EF4-FFF2-40B4-BE49-F238E27FC236}">
-                  <a16:creationId xmlns:a16="http://schemas.microsoft.com/office/drawing/2014/main" id="{09A208D5-7094-4229-8739-E32B90EE8819}"/>
-                </a:ext>
-              </a:extLst>
-            </p:cNvPr>
-            <p:cNvSpPr/>
-            <p:nvPr/>
-          </p:nvSpPr>
-          <p:spPr>
-            <a:xfrm>
-              <a:off x="4613672" y="3467385"/>
-              <a:ext cx="278607" cy="278607"/>
-            </a:xfrm>
-            <a:prstGeom prst="ellipse">
-              <a:avLst/>
-            </a:prstGeom>
-            <a:solidFill>
-              <a:schemeClr val="accent1">
-                <a:lumOff val="-13575"/>
-              </a:schemeClr>
-            </a:solidFill>
-            <a:ln w="12700" cap="flat">
-              <a:noFill/>
-              <a:miter lim="400000"/>
-            </a:ln>
-            <a:effectLst/>
-          </p:spPr>
-          <p:txBody>
-            <a:bodyPr wrap="square" lIns="35719" tIns="35719" rIns="35719" bIns="35719" numCol="1" anchor="ctr">
-              <a:noAutofit/>
-            </a:bodyPr>
-            <a:lstStyle/>
-            <a:p>
-              <a:pPr>
-                <a:defRPr sz="2200" b="0">
-                  <a:solidFill>
-                    <a:srgbClr val="FFFFFF"/>
-                  </a:solidFill>
-                  <a:latin typeface="+mn-lt"/>
-                  <a:ea typeface="+mn-ea"/>
-                  <a:cs typeface="+mn-cs"/>
-                  <a:sym typeface="Helvetica Neue Medium"/>
-                </a:defRPr>
-              </a:pPr>
-              <a:endParaRPr sz="1547"/>
-            </a:p>
-          </p:txBody>
-        </p:sp>
-        <p:sp>
-          <p:nvSpPr>
-            <p:cNvPr id="22" name="Asset Management">
-              <a:extLst>
-                <a:ext uri="{FF2B5EF4-FFF2-40B4-BE49-F238E27FC236}">
-                  <a16:creationId xmlns:a16="http://schemas.microsoft.com/office/drawing/2014/main" id="{1BB2D682-B728-4CCD-B1CB-7B58247E944B}"/>
-                </a:ext>
-              </a:extLst>
-            </p:cNvPr>
-            <p:cNvSpPr txBox="1"/>
-            <p:nvPr/>
-          </p:nvSpPr>
-          <p:spPr>
-            <a:xfrm>
-              <a:off x="3752055" y="4674487"/>
-              <a:ext cx="1350819" cy="266933"/>
-            </a:xfrm>
-            <a:prstGeom prst="rect">
-              <a:avLst/>
-            </a:prstGeom>
+          <a:prstGeom prst="ellipse">
+            <a:avLst/>
+          </a:prstGeom>
+          <a:solidFill>
+            <a:schemeClr val="accent1">
+              <a:lumOff val="-13575"/>
+            </a:schemeClr>
+          </a:solidFill>
+          <a:ln w="12700" cap="flat">
             <a:noFill/>
-            <a:ln w="12700" cap="flat">
-              <a:noFill/>
-              <a:miter lim="400000"/>
-            </a:ln>
-            <a:effectLst/>
+            <a:miter lim="400000"/>
+          </a:ln>
+          <a:effectLst/>
+        </p:spPr>
+        <p:txBody>
+          <a:bodyPr wrap="square" lIns="35719" tIns="35719" rIns="35719" bIns="35719" numCol="1" anchor="ctr">
+            <a:noAutofit/>
+          </a:bodyPr>
+          <a:lstStyle/>
+          <a:p>
+            <a:pPr>
+              <a:defRPr sz="2200" b="0">
+                <a:solidFill>
+                  <a:srgbClr val="27FF3B"/>
+                </a:solidFill>
+                <a:latin typeface="+mn-lt"/>
+                <a:ea typeface="+mn-ea"/>
+                <a:cs typeface="+mn-cs"/>
+                <a:sym typeface="Helvetica Neue Medium"/>
+              </a:defRPr>
+            </a:pPr>
+            <a:endParaRPr sz="1547"/>
+          </a:p>
+        </p:txBody>
+      </p:sp>
+      <p:sp>
+        <p:nvSpPr>
+          <p:cNvPr id="20" name="Circle">
             <a:extLst>
-              <a:ext uri="{C572A759-6A51-4108-AA02-DFA0A04FC94B}">
-                <ma14:wrappingTextBoxFlag xmlns:ma14="http://schemas.microsoft.com/office/mac/drawingml/2011/main" xmlns:a14="http://schemas.microsoft.com/office/drawing/2010/main" xmlns:m="http://schemas.openxmlformats.org/officeDocument/2006/math" xmlns="" val="1"/>
+              <a:ext uri="{FF2B5EF4-FFF2-40B4-BE49-F238E27FC236}">
+                <a16:creationId xmlns:a16="http://schemas.microsoft.com/office/drawing/2014/main" id="{1E120C94-34DE-4A30-B3D9-A39664CCBDB0}"/>
               </a:ext>
             </a:extLst>
-          </p:spPr>
-          <p:txBody>
-            <a:bodyPr wrap="none" lIns="35719" tIns="35719" rIns="35719" bIns="35719" numCol="1" anchor="ctr">
-              <a:spAutoFit/>
-            </a:bodyPr>
-            <a:lstStyle>
-              <a:lvl1pPr>
-                <a:defRPr sz="1800"/>
-              </a:lvl1pPr>
-            </a:lstStyle>
-            <a:p>
-              <a:r>
-                <a:rPr sz="1266" dirty="0"/>
-                <a:t>Asset Management</a:t>
-              </a:r>
-            </a:p>
-          </p:txBody>
-        </p:sp>
-        <p:sp>
-          <p:nvSpPr>
-            <p:cNvPr id="23" name="Power Management">
-              <a:extLst>
-                <a:ext uri="{FF2B5EF4-FFF2-40B4-BE49-F238E27FC236}">
-                  <a16:creationId xmlns:a16="http://schemas.microsoft.com/office/drawing/2014/main" id="{A981B78F-AA5C-497D-9CB6-13B96E7136D8}"/>
-                </a:ext>
-              </a:extLst>
-            </p:cNvPr>
-            <p:cNvSpPr txBox="1"/>
-            <p:nvPr/>
-          </p:nvSpPr>
-          <p:spPr>
-            <a:xfrm>
-              <a:off x="4284890" y="4075466"/>
-              <a:ext cx="1408912" cy="266933"/>
-            </a:xfrm>
-            <a:prstGeom prst="rect">
-              <a:avLst/>
-            </a:prstGeom>
+          </p:cNvPr>
+          <p:cNvSpPr/>
+          <p:nvPr/>
+        </p:nvSpPr>
+        <p:spPr>
+          <a:xfrm>
+            <a:off x="2610230" y="4200593"/>
+            <a:ext cx="278607" cy="278607"/>
+          </a:xfrm>
+          <a:prstGeom prst="ellipse">
+            <a:avLst/>
+          </a:prstGeom>
+          <a:solidFill>
+            <a:schemeClr val="accent1">
+              <a:lumOff val="-13575"/>
+            </a:schemeClr>
+          </a:solidFill>
+          <a:ln w="12700" cap="flat">
             <a:noFill/>
-            <a:ln w="12700" cap="flat">
-              <a:noFill/>
-              <a:miter lim="400000"/>
-            </a:ln>
-            <a:effectLst/>
+            <a:miter lim="400000"/>
+          </a:ln>
+          <a:effectLst/>
+        </p:spPr>
+        <p:txBody>
+          <a:bodyPr wrap="square" lIns="35719" tIns="35719" rIns="35719" bIns="35719" numCol="1" anchor="ctr">
+            <a:noAutofit/>
+          </a:bodyPr>
+          <a:lstStyle/>
+          <a:p>
+            <a:pPr>
+              <a:defRPr sz="2200" b="0">
+                <a:solidFill>
+                  <a:srgbClr val="FFFFFF"/>
+                </a:solidFill>
+                <a:latin typeface="+mn-lt"/>
+                <a:ea typeface="+mn-ea"/>
+                <a:cs typeface="+mn-cs"/>
+                <a:sym typeface="Helvetica Neue Medium"/>
+              </a:defRPr>
+            </a:pPr>
+            <a:endParaRPr sz="1547"/>
+          </a:p>
+        </p:txBody>
+      </p:sp>
+      <p:sp>
+        <p:nvSpPr>
+          <p:cNvPr id="21" name="Circle">
             <a:extLst>
-              <a:ext uri="{C572A759-6A51-4108-AA02-DFA0A04FC94B}">
-                <ma14:wrappingTextBoxFlag xmlns:ma14="http://schemas.microsoft.com/office/mac/drawingml/2011/main" xmlns:a14="http://schemas.microsoft.com/office/drawing/2010/main" xmlns:m="http://schemas.openxmlformats.org/officeDocument/2006/math" xmlns="" val="1"/>
+              <a:ext uri="{FF2B5EF4-FFF2-40B4-BE49-F238E27FC236}">
+                <a16:creationId xmlns:a16="http://schemas.microsoft.com/office/drawing/2014/main" id="{09A208D5-7094-4229-8739-E32B90EE8819}"/>
               </a:ext>
             </a:extLst>
-          </p:spPr>
-          <p:txBody>
-            <a:bodyPr wrap="none" lIns="35719" tIns="35719" rIns="35719" bIns="35719" numCol="1" anchor="ctr">
-              <a:spAutoFit/>
-            </a:bodyPr>
-            <a:lstStyle>
-              <a:lvl1pPr>
-                <a:defRPr sz="1800"/>
-              </a:lvl1pPr>
-            </a:lstStyle>
-            <a:p>
-              <a:r>
-                <a:rPr sz="1266" dirty="0"/>
-                <a:t>Power Management</a:t>
-              </a:r>
-            </a:p>
-          </p:txBody>
-        </p:sp>
-        <p:sp>
-          <p:nvSpPr>
-            <p:cNvPr id="24" name="Change Management">
-              <a:extLst>
-                <a:ext uri="{FF2B5EF4-FFF2-40B4-BE49-F238E27FC236}">
-                  <a16:creationId xmlns:a16="http://schemas.microsoft.com/office/drawing/2014/main" id="{EAEC5128-BA04-4DD5-959B-54798EDCC76A}"/>
-                </a:ext>
-              </a:extLst>
-            </p:cNvPr>
-            <p:cNvSpPr txBox="1"/>
-            <p:nvPr/>
-          </p:nvSpPr>
-          <p:spPr>
-            <a:xfrm>
-              <a:off x="4859256" y="3617331"/>
-              <a:ext cx="1485023" cy="266933"/>
-            </a:xfrm>
-            <a:prstGeom prst="rect">
-              <a:avLst/>
-            </a:prstGeom>
+          </p:cNvPr>
+          <p:cNvSpPr/>
+          <p:nvPr/>
+        </p:nvSpPr>
+        <p:spPr>
+          <a:xfrm>
+            <a:off x="3179307" y="3673757"/>
+            <a:ext cx="278607" cy="278607"/>
+          </a:xfrm>
+          <a:prstGeom prst="ellipse">
+            <a:avLst/>
+          </a:prstGeom>
+          <a:solidFill>
+            <a:schemeClr val="accent1">
+              <a:lumOff val="-13575"/>
+            </a:schemeClr>
+          </a:solidFill>
+          <a:ln w="12700" cap="flat">
             <a:noFill/>
-            <a:ln w="12700" cap="flat">
-              <a:noFill/>
-              <a:miter lim="400000"/>
-            </a:ln>
-            <a:effectLst/>
+            <a:miter lim="400000"/>
+          </a:ln>
+          <a:effectLst/>
+        </p:spPr>
+        <p:txBody>
+          <a:bodyPr wrap="square" lIns="35719" tIns="35719" rIns="35719" bIns="35719" numCol="1" anchor="ctr">
+            <a:noAutofit/>
+          </a:bodyPr>
+          <a:lstStyle/>
+          <a:p>
+            <a:pPr>
+              <a:defRPr sz="2200" b="0">
+                <a:solidFill>
+                  <a:srgbClr val="FFFFFF"/>
+                </a:solidFill>
+                <a:latin typeface="+mn-lt"/>
+                <a:ea typeface="+mn-ea"/>
+                <a:cs typeface="+mn-cs"/>
+                <a:sym typeface="Helvetica Neue Medium"/>
+              </a:defRPr>
+            </a:pPr>
+            <a:endParaRPr sz="1547"/>
+          </a:p>
+        </p:txBody>
+      </p:sp>
+      <p:sp>
+        <p:nvSpPr>
+          <p:cNvPr id="22" name="Asset Management">
             <a:extLst>
-              <a:ext uri="{C572A759-6A51-4108-AA02-DFA0A04FC94B}">
-                <ma14:wrappingTextBoxFlag xmlns:ma14="http://schemas.microsoft.com/office/mac/drawingml/2011/main" xmlns:a14="http://schemas.microsoft.com/office/drawing/2010/main" xmlns:m="http://schemas.openxmlformats.org/officeDocument/2006/math" xmlns="" val="1"/>
+              <a:ext uri="{FF2B5EF4-FFF2-40B4-BE49-F238E27FC236}">
+                <a16:creationId xmlns:a16="http://schemas.microsoft.com/office/drawing/2014/main" id="{1BB2D682-B728-4CCD-B1CB-7B58247E944B}"/>
               </a:ext>
             </a:extLst>
-          </p:spPr>
-          <p:txBody>
-            <a:bodyPr wrap="none" lIns="35719" tIns="35719" rIns="35719" bIns="35719" numCol="1" anchor="ctr">
-              <a:spAutoFit/>
-            </a:bodyPr>
-            <a:lstStyle>
-              <a:lvl1pPr>
-                <a:defRPr sz="1800"/>
-              </a:lvl1pPr>
-            </a:lstStyle>
-            <a:p>
-              <a:r>
-                <a:rPr sz="1266" dirty="0"/>
-                <a:t>Change Management</a:t>
-              </a:r>
-            </a:p>
-          </p:txBody>
-        </p:sp>
-        <p:sp>
-          <p:nvSpPr>
-            <p:cNvPr id="25" name="Circle">
-              <a:extLst>
-                <a:ext uri="{FF2B5EF4-FFF2-40B4-BE49-F238E27FC236}">
-                  <a16:creationId xmlns:a16="http://schemas.microsoft.com/office/drawing/2014/main" id="{A9E30164-C239-4753-98E5-6600B64A7E26}"/>
-                </a:ext>
-              </a:extLst>
-            </p:cNvPr>
-            <p:cNvSpPr/>
-            <p:nvPr/>
-          </p:nvSpPr>
-          <p:spPr>
-            <a:xfrm>
-              <a:off x="5362773" y="2994111"/>
-              <a:ext cx="278607" cy="278607"/>
-            </a:xfrm>
-            <a:prstGeom prst="ellipse">
-              <a:avLst/>
-            </a:prstGeom>
-            <a:solidFill>
-              <a:schemeClr val="accent1">
-                <a:lumOff val="-13575"/>
-              </a:schemeClr>
-            </a:solidFill>
-            <a:ln w="12700" cap="flat">
-              <a:noFill/>
-              <a:miter lim="400000"/>
-            </a:ln>
-            <a:effectLst/>
-          </p:spPr>
-          <p:txBody>
-            <a:bodyPr wrap="square" lIns="35719" tIns="35719" rIns="35719" bIns="35719" numCol="1" anchor="ctr">
-              <a:noAutofit/>
-            </a:bodyPr>
-            <a:lstStyle/>
-            <a:p>
-              <a:pPr>
-                <a:defRPr sz="2200" b="0">
-                  <a:solidFill>
-                    <a:srgbClr val="FFFFFF"/>
-                  </a:solidFill>
-                  <a:latin typeface="+mn-lt"/>
-                  <a:ea typeface="+mn-ea"/>
-                  <a:cs typeface="+mn-cs"/>
-                  <a:sym typeface="Helvetica Neue Medium"/>
-                </a:defRPr>
-              </a:pPr>
-              <a:endParaRPr sz="1547"/>
-            </a:p>
-          </p:txBody>
-        </p:sp>
-        <p:sp>
-          <p:nvSpPr>
-            <p:cNvPr id="26" name="Capacity Management">
-              <a:extLst>
-                <a:ext uri="{FF2B5EF4-FFF2-40B4-BE49-F238E27FC236}">
-                  <a16:creationId xmlns:a16="http://schemas.microsoft.com/office/drawing/2014/main" id="{67DAFB54-350C-48DA-859E-6D4AC991E202}"/>
-                </a:ext>
-              </a:extLst>
-            </p:cNvPr>
-            <p:cNvSpPr txBox="1"/>
-            <p:nvPr/>
-          </p:nvSpPr>
-          <p:spPr>
-            <a:xfrm>
-              <a:off x="5567800" y="3159454"/>
-              <a:ext cx="1556901" cy="266933"/>
-            </a:xfrm>
-            <a:prstGeom prst="rect">
-              <a:avLst/>
-            </a:prstGeom>
+          </p:cNvPr>
+          <p:cNvSpPr txBox="1"/>
+          <p:nvPr/>
+        </p:nvSpPr>
+        <p:spPr>
+          <a:xfrm>
+            <a:off x="2328643" y="5020203"/>
+            <a:ext cx="1350819" cy="266933"/>
+          </a:xfrm>
+          <a:prstGeom prst="rect">
+            <a:avLst/>
+          </a:prstGeom>
+          <a:noFill/>
+          <a:ln w="12700" cap="flat">
             <a:noFill/>
-            <a:ln w="12700" cap="flat">
-              <a:noFill/>
-              <a:miter lim="400000"/>
-            </a:ln>
-            <a:effectLst/>
+            <a:miter lim="400000"/>
+          </a:ln>
+          <a:effectLst/>
+          <a:extLst>
+            <a:ext uri="{C572A759-6A51-4108-AA02-DFA0A04FC94B}">
+              <ma14:wrappingTextBoxFlag xmlns="" xmlns:m="http://schemas.openxmlformats.org/officeDocument/2006/math" xmlns:a14="http://schemas.microsoft.com/office/drawing/2010/main" xmlns:ma14="http://schemas.microsoft.com/office/mac/drawingml/2011/main" val="1"/>
+            </a:ext>
+          </a:extLst>
+        </p:spPr>
+        <p:txBody>
+          <a:bodyPr wrap="none" lIns="35719" tIns="35719" rIns="35719" bIns="35719" numCol="1" anchor="ctr">
+            <a:spAutoFit/>
+          </a:bodyPr>
+          <a:lstStyle>
+            <a:lvl1pPr>
+              <a:defRPr sz="1800"/>
+            </a:lvl1pPr>
+          </a:lstStyle>
+          <a:p>
+            <a:r>
+              <a:rPr sz="1266" dirty="0"/>
+              <a:t>Asset Management</a:t>
+            </a:r>
+          </a:p>
+        </p:txBody>
+      </p:sp>
+      <p:sp>
+        <p:nvSpPr>
+          <p:cNvPr id="23" name="Power Management">
             <a:extLst>
-              <a:ext uri="{C572A759-6A51-4108-AA02-DFA0A04FC94B}">
-                <ma14:wrappingTextBoxFlag xmlns:ma14="http://schemas.microsoft.com/office/mac/drawingml/2011/main" xmlns:a14="http://schemas.microsoft.com/office/drawing/2010/main" xmlns:m="http://schemas.openxmlformats.org/officeDocument/2006/math" xmlns="" val="1"/>
+              <a:ext uri="{FF2B5EF4-FFF2-40B4-BE49-F238E27FC236}">
+                <a16:creationId xmlns:a16="http://schemas.microsoft.com/office/drawing/2014/main" id="{A981B78F-AA5C-497D-9CB6-13B96E7136D8}"/>
               </a:ext>
             </a:extLst>
-          </p:spPr>
-          <p:txBody>
-            <a:bodyPr wrap="none" lIns="35719" tIns="35719" rIns="35719" bIns="35719" numCol="1" anchor="ctr">
-              <a:spAutoFit/>
-            </a:bodyPr>
-            <a:lstStyle>
-              <a:lvl1pPr>
-                <a:defRPr sz="1800"/>
-              </a:lvl1pPr>
-            </a:lstStyle>
-            <a:p>
-              <a:r>
-                <a:rPr sz="1266" dirty="0"/>
-                <a:t>Capacity Management</a:t>
-              </a:r>
-            </a:p>
-          </p:txBody>
-        </p:sp>
-      </p:grpSp>
+          </p:cNvPr>
+          <p:cNvSpPr txBox="1"/>
+          <p:nvPr/>
+        </p:nvSpPr>
+        <p:spPr>
+          <a:xfrm>
+            <a:off x="2859163" y="4386677"/>
+            <a:ext cx="1519648" cy="266933"/>
+          </a:xfrm>
+          <a:prstGeom prst="rect">
+            <a:avLst/>
+          </a:prstGeom>
+          <a:noFill/>
+          <a:ln w="12700" cap="flat">
+            <a:noFill/>
+            <a:miter lim="400000"/>
+          </a:ln>
+          <a:effectLst/>
+          <a:extLst>
+            <a:ext uri="{C572A759-6A51-4108-AA02-DFA0A04FC94B}">
+              <ma14:wrappingTextBoxFlag xmlns="" xmlns:m="http://schemas.openxmlformats.org/officeDocument/2006/math" xmlns:a14="http://schemas.microsoft.com/office/drawing/2010/main" xmlns:ma14="http://schemas.microsoft.com/office/mac/drawingml/2011/main" val="1"/>
+            </a:ext>
+          </a:extLst>
+        </p:spPr>
+        <p:txBody>
+          <a:bodyPr wrap="none" lIns="35719" tIns="35719" rIns="35719" bIns="35719" numCol="1" anchor="ctr">
+            <a:spAutoFit/>
+          </a:bodyPr>
+          <a:lstStyle>
+            <a:lvl1pPr>
+              <a:defRPr sz="1800"/>
+            </a:lvl1pPr>
+          </a:lstStyle>
+          <a:p>
+            <a:r>
+              <a:rPr lang="en-US" sz="1266" dirty="0"/>
+              <a:t>Power</a:t>
+            </a:r>
+            <a:r>
+              <a:rPr sz="1266" dirty="0"/>
+              <a:t> Management</a:t>
+            </a:r>
+          </a:p>
+        </p:txBody>
+      </p:sp>
+      <p:sp>
+        <p:nvSpPr>
+          <p:cNvPr id="24" name="Change Management">
+            <a:extLst>
+              <a:ext uri="{FF2B5EF4-FFF2-40B4-BE49-F238E27FC236}">
+                <a16:creationId xmlns:a16="http://schemas.microsoft.com/office/drawing/2014/main" id="{EAEC5128-BA04-4DD5-959B-54798EDCC76A}"/>
+              </a:ext>
+            </a:extLst>
+          </p:cNvPr>
+          <p:cNvSpPr txBox="1"/>
+          <p:nvPr/>
+        </p:nvSpPr>
+        <p:spPr>
+          <a:xfrm>
+            <a:off x="3424891" y="3823703"/>
+            <a:ext cx="1691169" cy="266933"/>
+          </a:xfrm>
+          <a:prstGeom prst="rect">
+            <a:avLst/>
+          </a:prstGeom>
+          <a:noFill/>
+          <a:ln w="12700" cap="flat">
+            <a:noFill/>
+            <a:miter lim="400000"/>
+          </a:ln>
+          <a:effectLst/>
+          <a:extLst>
+            <a:ext uri="{C572A759-6A51-4108-AA02-DFA0A04FC94B}">
+              <ma14:wrappingTextBoxFlag xmlns="" xmlns:m="http://schemas.openxmlformats.org/officeDocument/2006/math" xmlns:a14="http://schemas.microsoft.com/office/drawing/2010/main" xmlns:ma14="http://schemas.microsoft.com/office/mac/drawingml/2011/main" val="1"/>
+            </a:ext>
+          </a:extLst>
+        </p:spPr>
+        <p:txBody>
+          <a:bodyPr wrap="none" lIns="35719" tIns="35719" rIns="35719" bIns="35719" numCol="1" anchor="ctr">
+            <a:spAutoFit/>
+          </a:bodyPr>
+          <a:lstStyle>
+            <a:lvl1pPr>
+              <a:defRPr sz="1800"/>
+            </a:lvl1pPr>
+          </a:lstStyle>
+          <a:p>
+            <a:r>
+              <a:rPr lang="en-US" sz="1266" dirty="0"/>
+              <a:t>Capacity</a:t>
+            </a:r>
+            <a:r>
+              <a:rPr sz="1266" dirty="0"/>
+              <a:t> Management</a:t>
+            </a:r>
+          </a:p>
+        </p:txBody>
+      </p:sp>
+      <p:sp>
+        <p:nvSpPr>
+          <p:cNvPr id="25" name="Circle">
+            <a:extLst>
+              <a:ext uri="{FF2B5EF4-FFF2-40B4-BE49-F238E27FC236}">
+                <a16:creationId xmlns:a16="http://schemas.microsoft.com/office/drawing/2014/main" id="{A9E30164-C239-4753-98E5-6600B64A7E26}"/>
+              </a:ext>
+            </a:extLst>
+          </p:cNvPr>
+          <p:cNvSpPr/>
+          <p:nvPr/>
+        </p:nvSpPr>
+        <p:spPr>
+          <a:xfrm>
+            <a:off x="3561482" y="3395150"/>
+            <a:ext cx="278607" cy="278607"/>
+          </a:xfrm>
+          <a:prstGeom prst="ellipse">
+            <a:avLst/>
+          </a:prstGeom>
+          <a:solidFill>
+            <a:schemeClr val="accent1">
+              <a:lumOff val="-13575"/>
+            </a:schemeClr>
+          </a:solidFill>
+          <a:ln w="12700" cap="flat">
+            <a:noFill/>
+            <a:miter lim="400000"/>
+          </a:ln>
+          <a:effectLst/>
+        </p:spPr>
+        <p:txBody>
+          <a:bodyPr wrap="square" lIns="35719" tIns="35719" rIns="35719" bIns="35719" numCol="1" anchor="ctr">
+            <a:noAutofit/>
+          </a:bodyPr>
+          <a:lstStyle/>
+          <a:p>
+            <a:pPr>
+              <a:defRPr sz="2200" b="0">
+                <a:solidFill>
+                  <a:srgbClr val="FFFFFF"/>
+                </a:solidFill>
+                <a:latin typeface="+mn-lt"/>
+                <a:ea typeface="+mn-ea"/>
+                <a:cs typeface="+mn-cs"/>
+                <a:sym typeface="Helvetica Neue Medium"/>
+              </a:defRPr>
+            </a:pPr>
+            <a:endParaRPr sz="1547"/>
+          </a:p>
+        </p:txBody>
+      </p:sp>
+      <p:sp>
+        <p:nvSpPr>
+          <p:cNvPr id="26" name="Capacity Management">
+            <a:extLst>
+              <a:ext uri="{FF2B5EF4-FFF2-40B4-BE49-F238E27FC236}">
+                <a16:creationId xmlns:a16="http://schemas.microsoft.com/office/drawing/2014/main" id="{67DAFB54-350C-48DA-859E-6D4AC991E202}"/>
+              </a:ext>
+            </a:extLst>
+          </p:cNvPr>
+          <p:cNvSpPr txBox="1"/>
+          <p:nvPr/>
+        </p:nvSpPr>
+        <p:spPr>
+          <a:xfrm>
+            <a:off x="3766509" y="3560493"/>
+            <a:ext cx="2006961" cy="266933"/>
+          </a:xfrm>
+          <a:prstGeom prst="rect">
+            <a:avLst/>
+          </a:prstGeom>
+          <a:noFill/>
+          <a:ln w="12700" cap="flat">
+            <a:noFill/>
+            <a:miter lim="400000"/>
+          </a:ln>
+          <a:effectLst/>
+          <a:extLst>
+            <a:ext uri="{C572A759-6A51-4108-AA02-DFA0A04FC94B}">
+              <ma14:wrappingTextBoxFlag xmlns="" xmlns:m="http://schemas.openxmlformats.org/officeDocument/2006/math" xmlns:a14="http://schemas.microsoft.com/office/drawing/2010/main" xmlns:ma14="http://schemas.microsoft.com/office/mac/drawingml/2011/main" val="1"/>
+            </a:ext>
+          </a:extLst>
+        </p:spPr>
+        <p:txBody>
+          <a:bodyPr wrap="none" lIns="35719" tIns="35719" rIns="35719" bIns="35719" numCol="1" anchor="ctr">
+            <a:spAutoFit/>
+          </a:bodyPr>
+          <a:lstStyle>
+            <a:lvl1pPr>
+              <a:defRPr sz="1800"/>
+            </a:lvl1pPr>
+          </a:lstStyle>
+          <a:p>
+            <a:r>
+              <a:rPr lang="en-US" sz="1266" dirty="0"/>
+              <a:t>Reservations</a:t>
+            </a:r>
+            <a:r>
+              <a:rPr sz="1266" dirty="0"/>
+              <a:t> Management</a:t>
+            </a:r>
+          </a:p>
+        </p:txBody>
+      </p:sp>
       <p:sp>
         <p:nvSpPr>
           <p:cNvPr id="27" name="Business Insights">
@@ -28789,7 +28780,7 @@
           </a:ln>
           <a:extLst>
             <a:ext uri="{C572A759-6A51-4108-AA02-DFA0A04FC94B}">
-              <ma14:wrappingTextBoxFlag xmlns:ma14="http://schemas.microsoft.com/office/mac/drawingml/2011/main" xmlns:a14="http://schemas.microsoft.com/office/drawing/2010/main" xmlns:m="http://schemas.openxmlformats.org/officeDocument/2006/math" xmlns="" val="1"/>
+              <ma14:wrappingTextBoxFlag xmlns="" xmlns:m="http://schemas.openxmlformats.org/officeDocument/2006/math" xmlns:a14="http://schemas.microsoft.com/office/drawing/2010/main" xmlns:ma14="http://schemas.microsoft.com/office/mac/drawingml/2011/main" val="1"/>
             </a:ext>
           </a:extLst>
         </p:spPr>
@@ -28847,7 +28838,7 @@
           </a:ln>
           <a:extLst>
             <a:ext uri="{C572A759-6A51-4108-AA02-DFA0A04FC94B}">
-              <ma14:wrappingTextBoxFlag xmlns:ma14="http://schemas.microsoft.com/office/mac/drawingml/2011/main" xmlns:a14="http://schemas.microsoft.com/office/drawing/2010/main" xmlns:m="http://schemas.openxmlformats.org/officeDocument/2006/math" xmlns="" val="1"/>
+              <ma14:wrappingTextBoxFlag xmlns="" xmlns:m="http://schemas.openxmlformats.org/officeDocument/2006/math" xmlns:a14="http://schemas.microsoft.com/office/drawing/2010/main" xmlns:ma14="http://schemas.microsoft.com/office/mac/drawingml/2011/main" val="1"/>
             </a:ext>
           </a:extLst>
         </p:spPr>
@@ -28887,7 +28878,7 @@
         </p:nvSpPr>
         <p:spPr>
           <a:xfrm>
-            <a:off x="4527256" y="4715189"/>
+            <a:off x="4773132" y="4721423"/>
             <a:ext cx="3150054" cy="892969"/>
           </a:xfrm>
           <a:prstGeom prst="roundRect">
@@ -28905,7 +28896,7 @@
           </a:ln>
           <a:extLst>
             <a:ext uri="{C572A759-6A51-4108-AA02-DFA0A04FC94B}">
-              <ma14:wrappingTextBoxFlag xmlns:ma14="http://schemas.microsoft.com/office/mac/drawingml/2011/main" xmlns:a14="http://schemas.microsoft.com/office/drawing/2010/main" xmlns:m="http://schemas.openxmlformats.org/officeDocument/2006/math" xmlns="" val="1"/>
+              <ma14:wrappingTextBoxFlag xmlns="" xmlns:m="http://schemas.openxmlformats.org/officeDocument/2006/math" xmlns:a14="http://schemas.microsoft.com/office/drawing/2010/main" xmlns:ma14="http://schemas.microsoft.com/office/mac/drawingml/2011/main" val="1"/>
             </a:ext>
           </a:extLst>
         </p:spPr>
@@ -28928,6 +28919,531 @@
             <a:r>
               <a:rPr sz="1547" dirty="0"/>
               <a:t>How do we increase Operational Consistency in order to harvest Business Insights?</a:t>
+            </a:r>
+          </a:p>
+        </p:txBody>
+      </p:sp>
+      <p:sp>
+        <p:nvSpPr>
+          <p:cNvPr id="2" name="Circle">
+            <a:extLst>
+              <a:ext uri="{FF2B5EF4-FFF2-40B4-BE49-F238E27FC236}">
+                <a16:creationId xmlns:a16="http://schemas.microsoft.com/office/drawing/2014/main" id="{3FFF68BB-2598-8A40-A217-641D31D58ED0}"/>
+              </a:ext>
+            </a:extLst>
+          </p:cNvPr>
+          <p:cNvSpPr/>
+          <p:nvPr/>
+        </p:nvSpPr>
+        <p:spPr>
+          <a:xfrm>
+            <a:off x="1893382" y="5166157"/>
+            <a:ext cx="278607" cy="278607"/>
+          </a:xfrm>
+          <a:prstGeom prst="ellipse">
+            <a:avLst/>
+          </a:prstGeom>
+          <a:solidFill>
+            <a:schemeClr val="accent1">
+              <a:lumOff val="-13575"/>
+            </a:schemeClr>
+          </a:solidFill>
+          <a:ln w="12700" cap="flat">
+            <a:noFill/>
+            <a:miter lim="400000"/>
+          </a:ln>
+          <a:effectLst/>
+        </p:spPr>
+        <p:txBody>
+          <a:bodyPr wrap="square" lIns="35719" tIns="35719" rIns="35719" bIns="35719" numCol="1" anchor="ctr">
+            <a:noAutofit/>
+          </a:bodyPr>
+          <a:lstStyle/>
+          <a:p>
+            <a:pPr>
+              <a:defRPr sz="2200" b="0">
+                <a:solidFill>
+                  <a:srgbClr val="27FF3B"/>
+                </a:solidFill>
+                <a:latin typeface="+mn-lt"/>
+                <a:ea typeface="+mn-ea"/>
+                <a:cs typeface="+mn-cs"/>
+                <a:sym typeface="Helvetica Neue Medium"/>
+              </a:defRPr>
+            </a:pPr>
+            <a:endParaRPr sz="1547"/>
+          </a:p>
+        </p:txBody>
+      </p:sp>
+      <p:sp>
+        <p:nvSpPr>
+          <p:cNvPr id="3" name="Asset Management">
+            <a:extLst>
+              <a:ext uri="{FF2B5EF4-FFF2-40B4-BE49-F238E27FC236}">
+                <a16:creationId xmlns:a16="http://schemas.microsoft.com/office/drawing/2014/main" id="{325B5B4B-D5D0-6536-5E83-D0BAB1221A40}"/>
+              </a:ext>
+            </a:extLst>
+          </p:cNvPr>
+          <p:cNvSpPr txBox="1"/>
+          <p:nvPr/>
+        </p:nvSpPr>
+        <p:spPr>
+          <a:xfrm>
+            <a:off x="1987242" y="5420449"/>
+            <a:ext cx="1340111" cy="266933"/>
+          </a:xfrm>
+          <a:prstGeom prst="rect">
+            <a:avLst/>
+          </a:prstGeom>
+          <a:noFill/>
+          <a:ln w="12700" cap="flat">
+            <a:noFill/>
+            <a:miter lim="400000"/>
+          </a:ln>
+          <a:effectLst/>
+          <a:extLst>
+            <a:ext uri="{C572A759-6A51-4108-AA02-DFA0A04FC94B}">
+              <ma14:wrappingTextBoxFlag xmlns="" xmlns:m="http://schemas.openxmlformats.org/officeDocument/2006/math" xmlns:a14="http://schemas.microsoft.com/office/drawing/2010/main" xmlns:ma14="http://schemas.microsoft.com/office/mac/drawingml/2011/main" val="1"/>
+            </a:ext>
+          </a:extLst>
+        </p:spPr>
+        <p:txBody>
+          <a:bodyPr wrap="none" lIns="35719" tIns="35719" rIns="35719" bIns="35719" numCol="1" anchor="ctr">
+            <a:spAutoFit/>
+          </a:bodyPr>
+          <a:lstStyle>
+            <a:lvl1pPr>
+              <a:defRPr sz="1800"/>
+            </a:lvl1pPr>
+          </a:lstStyle>
+          <a:p>
+            <a:r>
+              <a:rPr lang="en-US" sz="1266" dirty="0"/>
+              <a:t>Site</a:t>
+            </a:r>
+            <a:r>
+              <a:rPr sz="1266" dirty="0"/>
+              <a:t> Management</a:t>
+            </a:r>
+          </a:p>
+        </p:txBody>
+      </p:sp>
+      <p:sp>
+        <p:nvSpPr>
+          <p:cNvPr id="4" name="Circle">
+            <a:extLst>
+              <a:ext uri="{FF2B5EF4-FFF2-40B4-BE49-F238E27FC236}">
+                <a16:creationId xmlns:a16="http://schemas.microsoft.com/office/drawing/2014/main" id="{B46325D9-7AEF-DAC2-CC62-43B861B5EB96}"/>
+              </a:ext>
+            </a:extLst>
+          </p:cNvPr>
+          <p:cNvSpPr/>
+          <p:nvPr/>
+        </p:nvSpPr>
+        <p:spPr>
+          <a:xfrm>
+            <a:off x="2344579" y="4510187"/>
+            <a:ext cx="278607" cy="278607"/>
+          </a:xfrm>
+          <a:prstGeom prst="ellipse">
+            <a:avLst/>
+          </a:prstGeom>
+          <a:solidFill>
+            <a:schemeClr val="accent1">
+              <a:lumOff val="-13575"/>
+            </a:schemeClr>
+          </a:solidFill>
+          <a:ln w="12700" cap="flat">
+            <a:noFill/>
+            <a:miter lim="400000"/>
+          </a:ln>
+          <a:effectLst/>
+        </p:spPr>
+        <p:txBody>
+          <a:bodyPr wrap="square" lIns="35719" tIns="35719" rIns="35719" bIns="35719" numCol="1" anchor="ctr">
+            <a:noAutofit/>
+          </a:bodyPr>
+          <a:lstStyle/>
+          <a:p>
+            <a:pPr>
+              <a:defRPr sz="2200" b="0">
+                <a:solidFill>
+                  <a:srgbClr val="FFFFFF"/>
+                </a:solidFill>
+                <a:latin typeface="+mn-lt"/>
+                <a:ea typeface="+mn-ea"/>
+                <a:cs typeface="+mn-cs"/>
+                <a:sym typeface="Helvetica Neue Medium"/>
+              </a:defRPr>
+            </a:pPr>
+            <a:endParaRPr sz="1547"/>
+          </a:p>
+        </p:txBody>
+      </p:sp>
+      <p:sp>
+        <p:nvSpPr>
+          <p:cNvPr id="30" name="Power Management">
+            <a:extLst>
+              <a:ext uri="{FF2B5EF4-FFF2-40B4-BE49-F238E27FC236}">
+                <a16:creationId xmlns:a16="http://schemas.microsoft.com/office/drawing/2014/main" id="{ABDC91F3-FBBA-E3C8-251F-5311E9DBBCBF}"/>
+              </a:ext>
+            </a:extLst>
+          </p:cNvPr>
+          <p:cNvSpPr txBox="1"/>
+          <p:nvPr/>
+        </p:nvSpPr>
+        <p:spPr>
+          <a:xfrm>
+            <a:off x="2524790" y="4688738"/>
+            <a:ext cx="2068131" cy="266933"/>
+          </a:xfrm>
+          <a:prstGeom prst="rect">
+            <a:avLst/>
+          </a:prstGeom>
+          <a:noFill/>
+          <a:ln w="12700" cap="flat">
+            <a:noFill/>
+            <a:miter lim="400000"/>
+          </a:ln>
+          <a:effectLst/>
+          <a:extLst>
+            <a:ext uri="{C572A759-6A51-4108-AA02-DFA0A04FC94B}">
+              <ma14:wrappingTextBoxFlag xmlns="" xmlns:m="http://schemas.openxmlformats.org/officeDocument/2006/math" xmlns:a14="http://schemas.microsoft.com/office/drawing/2010/main" xmlns:ma14="http://schemas.microsoft.com/office/mac/drawingml/2011/main" val="1"/>
+            </a:ext>
+          </a:extLst>
+        </p:spPr>
+        <p:txBody>
+          <a:bodyPr wrap="none" lIns="35719" tIns="35719" rIns="35719" bIns="35719" numCol="1" anchor="ctr">
+            <a:spAutoFit/>
+          </a:bodyPr>
+          <a:lstStyle>
+            <a:lvl1pPr>
+              <a:defRPr sz="1800"/>
+            </a:lvl1pPr>
+          </a:lstStyle>
+          <a:p>
+            <a:r>
+              <a:rPr lang="en-US" sz="1266" dirty="0"/>
+              <a:t>Ops-Workflow</a:t>
+            </a:r>
+            <a:r>
+              <a:rPr sz="1266" dirty="0"/>
+              <a:t> Management</a:t>
+            </a:r>
+          </a:p>
+        </p:txBody>
+      </p:sp>
+      <p:sp>
+        <p:nvSpPr>
+          <p:cNvPr id="31" name="Circle">
+            <a:extLst>
+              <a:ext uri="{FF2B5EF4-FFF2-40B4-BE49-F238E27FC236}">
+                <a16:creationId xmlns:a16="http://schemas.microsoft.com/office/drawing/2014/main" id="{EB725876-4F35-C8FB-3139-9639EA699971}"/>
+              </a:ext>
+            </a:extLst>
+          </p:cNvPr>
+          <p:cNvSpPr/>
+          <p:nvPr/>
+        </p:nvSpPr>
+        <p:spPr>
+          <a:xfrm>
+            <a:off x="2869105" y="3936318"/>
+            <a:ext cx="278607" cy="278607"/>
+          </a:xfrm>
+          <a:prstGeom prst="ellipse">
+            <a:avLst/>
+          </a:prstGeom>
+          <a:solidFill>
+            <a:schemeClr val="accent1">
+              <a:lumOff val="-13575"/>
+            </a:schemeClr>
+          </a:solidFill>
+          <a:ln w="12700" cap="flat">
+            <a:noFill/>
+            <a:miter lim="400000"/>
+          </a:ln>
+          <a:effectLst/>
+        </p:spPr>
+        <p:txBody>
+          <a:bodyPr wrap="square" lIns="35719" tIns="35719" rIns="35719" bIns="35719" numCol="1" anchor="ctr">
+            <a:noAutofit/>
+          </a:bodyPr>
+          <a:lstStyle/>
+          <a:p>
+            <a:pPr>
+              <a:defRPr sz="2200" b="0">
+                <a:solidFill>
+                  <a:srgbClr val="FFFFFF"/>
+                </a:solidFill>
+                <a:latin typeface="+mn-lt"/>
+                <a:ea typeface="+mn-ea"/>
+                <a:cs typeface="+mn-cs"/>
+                <a:sym typeface="Helvetica Neue Medium"/>
+              </a:defRPr>
+            </a:pPr>
+            <a:endParaRPr sz="1547"/>
+          </a:p>
+        </p:txBody>
+      </p:sp>
+      <p:sp>
+        <p:nvSpPr>
+          <p:cNvPr id="32" name="Change Management">
+            <a:extLst>
+              <a:ext uri="{FF2B5EF4-FFF2-40B4-BE49-F238E27FC236}">
+                <a16:creationId xmlns:a16="http://schemas.microsoft.com/office/drawing/2014/main" id="{02B9B3DA-2D88-D9EC-BF26-85634FBBF65D}"/>
+              </a:ext>
+            </a:extLst>
+          </p:cNvPr>
+          <p:cNvSpPr txBox="1"/>
+          <p:nvPr/>
+        </p:nvSpPr>
+        <p:spPr>
+          <a:xfrm>
+            <a:off x="3114689" y="4086264"/>
+            <a:ext cx="2122377" cy="266933"/>
+          </a:xfrm>
+          <a:prstGeom prst="rect">
+            <a:avLst/>
+          </a:prstGeom>
+          <a:noFill/>
+          <a:ln w="12700" cap="flat">
+            <a:noFill/>
+            <a:miter lim="400000"/>
+          </a:ln>
+          <a:effectLst/>
+          <a:extLst>
+            <a:ext uri="{C572A759-6A51-4108-AA02-DFA0A04FC94B}">
+              <ma14:wrappingTextBoxFlag xmlns="" xmlns:m="http://schemas.openxmlformats.org/officeDocument/2006/math" xmlns:a14="http://schemas.microsoft.com/office/drawing/2010/main" xmlns:ma14="http://schemas.microsoft.com/office/mac/drawingml/2011/main" val="1"/>
+            </a:ext>
+          </a:extLst>
+        </p:spPr>
+        <p:txBody>
+          <a:bodyPr wrap="none" lIns="35719" tIns="35719" rIns="35719" bIns="35719" numCol="1" anchor="ctr">
+            <a:spAutoFit/>
+          </a:bodyPr>
+          <a:lstStyle>
+            <a:lvl1pPr>
+              <a:defRPr sz="1800"/>
+            </a:lvl1pPr>
+          </a:lstStyle>
+          <a:p>
+            <a:r>
+              <a:rPr lang="en-US" sz="1266" dirty="0"/>
+              <a:t>Cable/Network </a:t>
+            </a:r>
+            <a:r>
+              <a:rPr sz="1266" dirty="0"/>
+              <a:t>Management</a:t>
+            </a:r>
+          </a:p>
+        </p:txBody>
+      </p:sp>
+      <p:sp>
+        <p:nvSpPr>
+          <p:cNvPr id="33" name="Circle">
+            <a:extLst>
+              <a:ext uri="{FF2B5EF4-FFF2-40B4-BE49-F238E27FC236}">
+                <a16:creationId xmlns:a16="http://schemas.microsoft.com/office/drawing/2014/main" id="{AFA1A323-C279-62F1-A16F-214DF194514D}"/>
+              </a:ext>
+            </a:extLst>
+          </p:cNvPr>
+          <p:cNvSpPr/>
+          <p:nvPr/>
+        </p:nvSpPr>
+        <p:spPr>
+          <a:xfrm>
+            <a:off x="3946184" y="3178843"/>
+            <a:ext cx="278607" cy="278607"/>
+          </a:xfrm>
+          <a:prstGeom prst="ellipse">
+            <a:avLst/>
+          </a:prstGeom>
+          <a:solidFill>
+            <a:schemeClr val="accent1">
+              <a:lumOff val="-13575"/>
+            </a:schemeClr>
+          </a:solidFill>
+          <a:ln w="12700" cap="flat">
+            <a:noFill/>
+            <a:miter lim="400000"/>
+          </a:ln>
+          <a:effectLst/>
+        </p:spPr>
+        <p:txBody>
+          <a:bodyPr wrap="square" lIns="35719" tIns="35719" rIns="35719" bIns="35719" numCol="1" anchor="ctr">
+            <a:noAutofit/>
+          </a:bodyPr>
+          <a:lstStyle/>
+          <a:p>
+            <a:pPr>
+              <a:defRPr sz="2200" b="0">
+                <a:solidFill>
+                  <a:srgbClr val="FFFFFF"/>
+                </a:solidFill>
+                <a:latin typeface="+mn-lt"/>
+                <a:ea typeface="+mn-ea"/>
+                <a:cs typeface="+mn-cs"/>
+                <a:sym typeface="Helvetica Neue Medium"/>
+              </a:defRPr>
+            </a:pPr>
+            <a:endParaRPr sz="1547"/>
+          </a:p>
+        </p:txBody>
+      </p:sp>
+      <p:sp>
+        <p:nvSpPr>
+          <p:cNvPr id="34" name="Change Management">
+            <a:extLst>
+              <a:ext uri="{FF2B5EF4-FFF2-40B4-BE49-F238E27FC236}">
+                <a16:creationId xmlns:a16="http://schemas.microsoft.com/office/drawing/2014/main" id="{C455A972-24A6-8AB3-A28E-044C8148A735}"/>
+              </a:ext>
+            </a:extLst>
+          </p:cNvPr>
+          <p:cNvSpPr txBox="1"/>
+          <p:nvPr/>
+        </p:nvSpPr>
+        <p:spPr>
+          <a:xfrm>
+            <a:off x="4191768" y="3328789"/>
+            <a:ext cx="1663533" cy="266933"/>
+          </a:xfrm>
+          <a:prstGeom prst="rect">
+            <a:avLst/>
+          </a:prstGeom>
+          <a:noFill/>
+          <a:ln w="12700" cap="flat">
+            <a:noFill/>
+            <a:miter lim="400000"/>
+          </a:ln>
+          <a:effectLst/>
+          <a:extLst>
+            <a:ext uri="{C572A759-6A51-4108-AA02-DFA0A04FC94B}">
+              <ma14:wrappingTextBoxFlag xmlns="" xmlns:m="http://schemas.openxmlformats.org/officeDocument/2006/math" xmlns:a14="http://schemas.microsoft.com/office/drawing/2010/main" xmlns:ma14="http://schemas.microsoft.com/office/mac/drawingml/2011/main" val="1"/>
+            </a:ext>
+          </a:extLst>
+        </p:spPr>
+        <p:txBody>
+          <a:bodyPr wrap="none" lIns="35719" tIns="35719" rIns="35719" bIns="35719" numCol="1" anchor="ctr">
+            <a:spAutoFit/>
+          </a:bodyPr>
+          <a:lstStyle>
+            <a:lvl1pPr>
+              <a:defRPr sz="1800"/>
+            </a:lvl1pPr>
+          </a:lstStyle>
+          <a:p>
+            <a:r>
+              <a:rPr lang="en-US" sz="1266" dirty="0"/>
+              <a:t>Tenancy </a:t>
+            </a:r>
+            <a:r>
+              <a:rPr sz="1266" dirty="0"/>
+              <a:t>Management</a:t>
+            </a:r>
+          </a:p>
+        </p:txBody>
+      </p:sp>
+      <p:sp>
+        <p:nvSpPr>
+          <p:cNvPr id="35" name="Circle">
+            <a:extLst>
+              <a:ext uri="{FF2B5EF4-FFF2-40B4-BE49-F238E27FC236}">
+                <a16:creationId xmlns:a16="http://schemas.microsoft.com/office/drawing/2014/main" id="{5FAE3C43-3618-274F-C741-76B74C67442B}"/>
+              </a:ext>
+            </a:extLst>
+          </p:cNvPr>
+          <p:cNvSpPr/>
+          <p:nvPr/>
+        </p:nvSpPr>
+        <p:spPr>
+          <a:xfrm>
+            <a:off x="4357647" y="2967935"/>
+            <a:ext cx="278607" cy="278607"/>
+          </a:xfrm>
+          <a:prstGeom prst="ellipse">
+            <a:avLst/>
+          </a:prstGeom>
+          <a:solidFill>
+            <a:schemeClr val="accent1">
+              <a:lumOff val="-13575"/>
+            </a:schemeClr>
+          </a:solidFill>
+          <a:ln w="12700" cap="flat">
+            <a:noFill/>
+            <a:miter lim="400000"/>
+          </a:ln>
+          <a:effectLst/>
+        </p:spPr>
+        <p:txBody>
+          <a:bodyPr wrap="square" lIns="35719" tIns="35719" rIns="35719" bIns="35719" numCol="1" anchor="ctr">
+            <a:noAutofit/>
+          </a:bodyPr>
+          <a:lstStyle/>
+          <a:p>
+            <a:pPr>
+              <a:defRPr sz="2200" b="0">
+                <a:solidFill>
+                  <a:srgbClr val="FFFFFF"/>
+                </a:solidFill>
+                <a:latin typeface="+mn-lt"/>
+                <a:ea typeface="+mn-ea"/>
+                <a:cs typeface="+mn-cs"/>
+                <a:sym typeface="Helvetica Neue Medium"/>
+              </a:defRPr>
+            </a:pPr>
+            <a:endParaRPr sz="1547"/>
+          </a:p>
+        </p:txBody>
+      </p:sp>
+      <p:sp>
+        <p:nvSpPr>
+          <p:cNvPr id="36" name="Change Management">
+            <a:extLst>
+              <a:ext uri="{FF2B5EF4-FFF2-40B4-BE49-F238E27FC236}">
+                <a16:creationId xmlns:a16="http://schemas.microsoft.com/office/drawing/2014/main" id="{069EADCB-5D42-A9D7-1A0D-565044C86EC5}"/>
+              </a:ext>
+            </a:extLst>
+          </p:cNvPr>
+          <p:cNvSpPr txBox="1"/>
+          <p:nvPr/>
+        </p:nvSpPr>
+        <p:spPr>
+          <a:xfrm>
+            <a:off x="4603231" y="3117881"/>
+            <a:ext cx="1712008" cy="266933"/>
+          </a:xfrm>
+          <a:prstGeom prst="rect">
+            <a:avLst/>
+          </a:prstGeom>
+          <a:noFill/>
+          <a:ln w="12700" cap="flat">
+            <a:noFill/>
+            <a:miter lim="400000"/>
+          </a:ln>
+          <a:effectLst/>
+          <a:extLst>
+            <a:ext uri="{C572A759-6A51-4108-AA02-DFA0A04FC94B}">
+              <ma14:wrappingTextBoxFlag xmlns="" xmlns:m="http://schemas.openxmlformats.org/officeDocument/2006/math" xmlns:a14="http://schemas.microsoft.com/office/drawing/2010/main" xmlns:ma14="http://schemas.microsoft.com/office/mac/drawingml/2011/main" val="1"/>
+            </a:ext>
+          </a:extLst>
+        </p:spPr>
+        <p:txBody>
+          <a:bodyPr wrap="none" lIns="35719" tIns="35719" rIns="35719" bIns="35719" numCol="1" anchor="ctr">
+            <a:spAutoFit/>
+          </a:bodyPr>
+          <a:lstStyle>
+            <a:lvl1pPr>
+              <a:defRPr sz="1800"/>
+            </a:lvl1pPr>
+          </a:lstStyle>
+          <a:p>
+            <a:r>
+              <a:rPr lang="en-US" sz="1266" dirty="0"/>
+              <a:t>Analytics </a:t>
+            </a:r>
+            <a:r>
+              <a:rPr sz="1266" dirty="0"/>
+              <a:t>Management</a:t>
             </a:r>
           </a:p>
         </p:txBody>
@@ -29223,7 +29739,7 @@
                                           </p:stCondLst>
                                         </p:cTn>
                                         <p:tgtEl>
-                                          <p:spTgt spid="18"/>
+                                          <p:spTgt spid="11"/>
                                         </p:tgtEl>
                                         <p:attrNameLst>
                                           <p:attrName>style.visibility</p:attrName>
@@ -29237,7 +29753,7 @@
                                       <p:cBhvr>
                                         <p:cTn id="28" dur="500"/>
                                         <p:tgtEl>
-                                          <p:spTgt spid="18"/>
+                                          <p:spTgt spid="11"/>
                                         </p:tgtEl>
                                       </p:cBhvr>
                                     </p:animEffect>
@@ -29263,20 +29779,19 @@
                             </p:stCondLst>
                             <p:childTnLst>
                               <p:par>
-                                <p:cTn id="31" presetID="9" presetClass="entr" presetSubtype="0" fill="hold" nodeType="clickEffect">
+                                <p:cTn id="31" presetID="22" presetClass="entr" presetSubtype="8" fill="hold" grpId="0" nodeType="clickEffect">
                                   <p:stCondLst>
                                     <p:cond delay="0"/>
                                   </p:stCondLst>
+                                  <p:iterate>
+                                    <p:tmAbs val="0"/>
+                                  </p:iterate>
                                   <p:childTnLst>
                                     <p:set>
                                       <p:cBhvr>
-                                        <p:cTn id="32" dur="1" fill="hold">
-                                          <p:stCondLst>
-                                            <p:cond delay="0"/>
-                                          </p:stCondLst>
-                                        </p:cTn>
+                                        <p:cTn id="32" fill="hold"/>
                                         <p:tgtEl>
-                                          <p:spTgt spid="11"/>
+                                          <p:spTgt spid="14"/>
                                         </p:tgtEl>
                                         <p:attrNameLst>
                                           <p:attrName>style.visibility</p:attrName>
@@ -29286,11 +29801,11 @@
                                         <p:strVal val="visible"/>
                                       </p:to>
                                     </p:set>
-                                    <p:animEffect transition="in" filter="dissolve">
+                                    <p:animEffect transition="in" filter="wipe(left)">
                                       <p:cBhvr>
-                                        <p:cTn id="33" dur="500"/>
+                                        <p:cTn id="33" dur="1000"/>
                                         <p:tgtEl>
-                                          <p:spTgt spid="11"/>
+                                          <p:spTgt spid="14"/>
                                         </p:tgtEl>
                                       </p:cBhvr>
                                     </p:animEffect>
@@ -29316,7 +29831,7 @@
                             </p:stCondLst>
                             <p:childTnLst>
                               <p:par>
-                                <p:cTn id="36" presetID="22" presetClass="entr" presetSubtype="8" fill="hold" grpId="0" nodeType="clickEffect">
+                                <p:cTn id="36" presetID="9" presetClass="entr" fill="hold" grpId="0" nodeType="clickEffect">
                                   <p:stCondLst>
                                     <p:cond delay="0"/>
                                   </p:stCondLst>
@@ -29327,58 +29842,6 @@
                                     <p:set>
                                       <p:cBhvr>
                                         <p:cTn id="37" fill="hold"/>
-                                        <p:tgtEl>
-                                          <p:spTgt spid="14"/>
-                                        </p:tgtEl>
-                                        <p:attrNameLst>
-                                          <p:attrName>style.visibility</p:attrName>
-                                        </p:attrNameLst>
-                                      </p:cBhvr>
-                                      <p:to>
-                                        <p:strVal val="visible"/>
-                                      </p:to>
-                                    </p:set>
-                                    <p:animEffect transition="in" filter="wipe(left)">
-                                      <p:cBhvr>
-                                        <p:cTn id="38" dur="1000"/>
-                                        <p:tgtEl>
-                                          <p:spTgt spid="14"/>
-                                        </p:tgtEl>
-                                      </p:cBhvr>
-                                    </p:animEffect>
-                                  </p:childTnLst>
-                                </p:cTn>
-                              </p:par>
-                            </p:childTnLst>
-                          </p:cTn>
-                        </p:par>
-                      </p:childTnLst>
-                    </p:cTn>
-                  </p:par>
-                  <p:par>
-                    <p:cTn id="39" fill="hold">
-                      <p:stCondLst>
-                        <p:cond delay="indefinite"/>
-                      </p:stCondLst>
-                      <p:childTnLst>
-                        <p:par>
-                          <p:cTn id="40" fill="hold">
-                            <p:stCondLst>
-                              <p:cond delay="0"/>
-                            </p:stCondLst>
-                            <p:childTnLst>
-                              <p:par>
-                                <p:cTn id="41" presetID="9" presetClass="entr" fill="hold" grpId="0" nodeType="clickEffect">
-                                  <p:stCondLst>
-                                    <p:cond delay="0"/>
-                                  </p:stCondLst>
-                                  <p:iterate>
-                                    <p:tmAbs val="0"/>
-                                  </p:iterate>
-                                  <p:childTnLst>
-                                    <p:set>
-                                      <p:cBhvr>
-                                        <p:cTn id="42" fill="hold"/>
                                         <p:tgtEl>
                                           <p:spTgt spid="28"/>
                                         </p:tgtEl>
@@ -29392,7 +29855,7 @@
                                     </p:set>
                                     <p:animEffect transition="in" filter="dissolve">
                                       <p:cBhvr>
-                                        <p:cTn id="43" dur="800"/>
+                                        <p:cTn id="38" dur="800"/>
                                         <p:tgtEl>
                                           <p:spTgt spid="28"/>
                                         </p:tgtEl>
@@ -39419,7 +39882,7 @@
 </file>
 
 <file path=customXml/itemProps1.xml><?xml version="1.0" encoding="utf-8"?>
-<ds:datastoreItem xmlns:ds="http://schemas.openxmlformats.org/officeDocument/2006/customXml" ds:itemID="{D266753A-28ED-43AE-91E2-FDC6258164F0}">
+<ds:datastoreItem xmlns:ds="http://schemas.openxmlformats.org/officeDocument/2006/customXml" ds:itemID="{65868B19-9E83-4BD5-873F-5C7984EFC428}">
   <ds:schemaRefs>
     <ds:schemaRef ds:uri="http://schemas.microsoft.com/VisualStudio/2011/storyboarding/control"/>
   </ds:schemaRefs>
@@ -39427,7 +39890,7 @@
 </file>
 
 <file path=customXml/itemProps2.xml><?xml version="1.0" encoding="utf-8"?>
-<ds:datastoreItem xmlns:ds="http://schemas.openxmlformats.org/officeDocument/2006/customXml" ds:itemID="{65868B19-9E83-4BD5-873F-5C7984EFC428}">
+<ds:datastoreItem xmlns:ds="http://schemas.openxmlformats.org/officeDocument/2006/customXml" ds:itemID="{D266753A-28ED-43AE-91E2-FDC6258164F0}">
   <ds:schemaRefs>
     <ds:schemaRef ds:uri="http://schemas.microsoft.com/VisualStudio/2011/storyboarding/control"/>
   </ds:schemaRefs>

--- a/DCIM-RolesWorkflowAutomation.pptx
+++ b/DCIM-RolesWorkflowAutomation.pptx
@@ -27945,7 +27945,7 @@
             <a:effectLst/>
             <a:extLst>
               <a:ext uri="{C572A759-6A51-4108-AA02-DFA0A04FC94B}">
-                <ma14:wrappingTextBoxFlag xmlns="" xmlns:m="http://schemas.openxmlformats.org/officeDocument/2006/math" xmlns:a14="http://schemas.microsoft.com/office/drawing/2010/main" xmlns:ma14="http://schemas.microsoft.com/office/mac/drawingml/2011/main" val="1"/>
+                <ma14:wrappingTextBoxFlag xmlns:ma14="http://schemas.microsoft.com/office/mac/drawingml/2011/main" xmlns:a14="http://schemas.microsoft.com/office/drawing/2010/main" xmlns:m="http://schemas.openxmlformats.org/officeDocument/2006/math" xmlns="" val="1"/>
               </a:ext>
             </a:extLst>
           </p:spPr>
@@ -27994,7 +27994,7 @@
             <a:effectLst/>
             <a:extLst>
               <a:ext uri="{C572A759-6A51-4108-AA02-DFA0A04FC94B}">
-                <ma14:wrappingTextBoxFlag xmlns="" xmlns:m="http://schemas.openxmlformats.org/officeDocument/2006/math" xmlns:a14="http://schemas.microsoft.com/office/drawing/2010/main" xmlns:ma14="http://schemas.microsoft.com/office/mac/drawingml/2011/main" val="1"/>
+                <ma14:wrappingTextBoxFlag xmlns:ma14="http://schemas.microsoft.com/office/mac/drawingml/2011/main" xmlns:a14="http://schemas.microsoft.com/office/drawing/2010/main" xmlns:m="http://schemas.openxmlformats.org/officeDocument/2006/math" xmlns="" val="1"/>
               </a:ext>
             </a:extLst>
           </p:spPr>
@@ -28116,7 +28116,7 @@
             <a:effectLst/>
             <a:extLst>
               <a:ext uri="{C572A759-6A51-4108-AA02-DFA0A04FC94B}">
-                <ma14:wrappingTextBoxFlag xmlns="" xmlns:m="http://schemas.openxmlformats.org/officeDocument/2006/math" xmlns:a14="http://schemas.microsoft.com/office/drawing/2010/main" xmlns:ma14="http://schemas.microsoft.com/office/mac/drawingml/2011/main" val="1"/>
+                <ma14:wrappingTextBoxFlag xmlns:ma14="http://schemas.microsoft.com/office/mac/drawingml/2011/main" xmlns:a14="http://schemas.microsoft.com/office/drawing/2010/main" xmlns:m="http://schemas.openxmlformats.org/officeDocument/2006/math" xmlns="" val="1"/>
               </a:ext>
             </a:extLst>
           </p:spPr>
@@ -28234,7 +28234,7 @@
             <a:effectLst/>
             <a:extLst>
               <a:ext uri="{C572A759-6A51-4108-AA02-DFA0A04FC94B}">
-                <ma14:wrappingTextBoxFlag xmlns="" xmlns:m="http://schemas.openxmlformats.org/officeDocument/2006/math" xmlns:a14="http://schemas.microsoft.com/office/drawing/2010/main" xmlns:ma14="http://schemas.microsoft.com/office/mac/drawingml/2011/main" val="1"/>
+                <ma14:wrappingTextBoxFlag xmlns:ma14="http://schemas.microsoft.com/office/mac/drawingml/2011/main" xmlns:a14="http://schemas.microsoft.com/office/drawing/2010/main" xmlns:m="http://schemas.openxmlformats.org/officeDocument/2006/math" xmlns="" val="1"/>
               </a:ext>
             </a:extLst>
           </p:spPr>
@@ -28333,422 +28333,6 @@
       </p:sp>
       <p:sp>
         <p:nvSpPr>
-          <p:cNvPr id="19" name="Circle">
-            <a:extLst>
-              <a:ext uri="{FF2B5EF4-FFF2-40B4-BE49-F238E27FC236}">
-                <a16:creationId xmlns:a16="http://schemas.microsoft.com/office/drawing/2014/main" id="{B5E651A4-7448-4B5A-ABDE-A052E8A3DA31}"/>
-              </a:ext>
-            </a:extLst>
-          </p:cNvPr>
-          <p:cNvSpPr/>
-          <p:nvPr/>
-        </p:nvSpPr>
-        <p:spPr>
-          <a:xfrm>
-            <a:off x="2114995" y="4825145"/>
-            <a:ext cx="278607" cy="278607"/>
-          </a:xfrm>
-          <a:prstGeom prst="ellipse">
-            <a:avLst/>
-          </a:prstGeom>
-          <a:solidFill>
-            <a:schemeClr val="accent1">
-              <a:lumOff val="-13575"/>
-            </a:schemeClr>
-          </a:solidFill>
-          <a:ln w="12700" cap="flat">
-            <a:noFill/>
-            <a:miter lim="400000"/>
-          </a:ln>
-          <a:effectLst/>
-        </p:spPr>
-        <p:txBody>
-          <a:bodyPr wrap="square" lIns="35719" tIns="35719" rIns="35719" bIns="35719" numCol="1" anchor="ctr">
-            <a:noAutofit/>
-          </a:bodyPr>
-          <a:lstStyle/>
-          <a:p>
-            <a:pPr>
-              <a:defRPr sz="2200" b="0">
-                <a:solidFill>
-                  <a:srgbClr val="27FF3B"/>
-                </a:solidFill>
-                <a:latin typeface="+mn-lt"/>
-                <a:ea typeface="+mn-ea"/>
-                <a:cs typeface="+mn-cs"/>
-                <a:sym typeface="Helvetica Neue Medium"/>
-              </a:defRPr>
-            </a:pPr>
-            <a:endParaRPr sz="1547"/>
-          </a:p>
-        </p:txBody>
-      </p:sp>
-      <p:sp>
-        <p:nvSpPr>
-          <p:cNvPr id="20" name="Circle">
-            <a:extLst>
-              <a:ext uri="{FF2B5EF4-FFF2-40B4-BE49-F238E27FC236}">
-                <a16:creationId xmlns:a16="http://schemas.microsoft.com/office/drawing/2014/main" id="{1E120C94-34DE-4A30-B3D9-A39664CCBDB0}"/>
-              </a:ext>
-            </a:extLst>
-          </p:cNvPr>
-          <p:cNvSpPr/>
-          <p:nvPr/>
-        </p:nvSpPr>
-        <p:spPr>
-          <a:xfrm>
-            <a:off x="2610230" y="4200593"/>
-            <a:ext cx="278607" cy="278607"/>
-          </a:xfrm>
-          <a:prstGeom prst="ellipse">
-            <a:avLst/>
-          </a:prstGeom>
-          <a:solidFill>
-            <a:schemeClr val="accent1">
-              <a:lumOff val="-13575"/>
-            </a:schemeClr>
-          </a:solidFill>
-          <a:ln w="12700" cap="flat">
-            <a:noFill/>
-            <a:miter lim="400000"/>
-          </a:ln>
-          <a:effectLst/>
-        </p:spPr>
-        <p:txBody>
-          <a:bodyPr wrap="square" lIns="35719" tIns="35719" rIns="35719" bIns="35719" numCol="1" anchor="ctr">
-            <a:noAutofit/>
-          </a:bodyPr>
-          <a:lstStyle/>
-          <a:p>
-            <a:pPr>
-              <a:defRPr sz="2200" b="0">
-                <a:solidFill>
-                  <a:srgbClr val="FFFFFF"/>
-                </a:solidFill>
-                <a:latin typeface="+mn-lt"/>
-                <a:ea typeface="+mn-ea"/>
-                <a:cs typeface="+mn-cs"/>
-                <a:sym typeface="Helvetica Neue Medium"/>
-              </a:defRPr>
-            </a:pPr>
-            <a:endParaRPr sz="1547"/>
-          </a:p>
-        </p:txBody>
-      </p:sp>
-      <p:sp>
-        <p:nvSpPr>
-          <p:cNvPr id="21" name="Circle">
-            <a:extLst>
-              <a:ext uri="{FF2B5EF4-FFF2-40B4-BE49-F238E27FC236}">
-                <a16:creationId xmlns:a16="http://schemas.microsoft.com/office/drawing/2014/main" id="{09A208D5-7094-4229-8739-E32B90EE8819}"/>
-              </a:ext>
-            </a:extLst>
-          </p:cNvPr>
-          <p:cNvSpPr/>
-          <p:nvPr/>
-        </p:nvSpPr>
-        <p:spPr>
-          <a:xfrm>
-            <a:off x="3179307" y="3673757"/>
-            <a:ext cx="278607" cy="278607"/>
-          </a:xfrm>
-          <a:prstGeom prst="ellipse">
-            <a:avLst/>
-          </a:prstGeom>
-          <a:solidFill>
-            <a:schemeClr val="accent1">
-              <a:lumOff val="-13575"/>
-            </a:schemeClr>
-          </a:solidFill>
-          <a:ln w="12700" cap="flat">
-            <a:noFill/>
-            <a:miter lim="400000"/>
-          </a:ln>
-          <a:effectLst/>
-        </p:spPr>
-        <p:txBody>
-          <a:bodyPr wrap="square" lIns="35719" tIns="35719" rIns="35719" bIns="35719" numCol="1" anchor="ctr">
-            <a:noAutofit/>
-          </a:bodyPr>
-          <a:lstStyle/>
-          <a:p>
-            <a:pPr>
-              <a:defRPr sz="2200" b="0">
-                <a:solidFill>
-                  <a:srgbClr val="FFFFFF"/>
-                </a:solidFill>
-                <a:latin typeface="+mn-lt"/>
-                <a:ea typeface="+mn-ea"/>
-                <a:cs typeface="+mn-cs"/>
-                <a:sym typeface="Helvetica Neue Medium"/>
-              </a:defRPr>
-            </a:pPr>
-            <a:endParaRPr sz="1547"/>
-          </a:p>
-        </p:txBody>
-      </p:sp>
-      <p:sp>
-        <p:nvSpPr>
-          <p:cNvPr id="22" name="Asset Management">
-            <a:extLst>
-              <a:ext uri="{FF2B5EF4-FFF2-40B4-BE49-F238E27FC236}">
-                <a16:creationId xmlns:a16="http://schemas.microsoft.com/office/drawing/2014/main" id="{1BB2D682-B728-4CCD-B1CB-7B58247E944B}"/>
-              </a:ext>
-            </a:extLst>
-          </p:cNvPr>
-          <p:cNvSpPr txBox="1"/>
-          <p:nvPr/>
-        </p:nvSpPr>
-        <p:spPr>
-          <a:xfrm>
-            <a:off x="2328643" y="5020203"/>
-            <a:ext cx="1350819" cy="266933"/>
-          </a:xfrm>
-          <a:prstGeom prst="rect">
-            <a:avLst/>
-          </a:prstGeom>
-          <a:noFill/>
-          <a:ln w="12700" cap="flat">
-            <a:noFill/>
-            <a:miter lim="400000"/>
-          </a:ln>
-          <a:effectLst/>
-          <a:extLst>
-            <a:ext uri="{C572A759-6A51-4108-AA02-DFA0A04FC94B}">
-              <ma14:wrappingTextBoxFlag xmlns="" xmlns:m="http://schemas.openxmlformats.org/officeDocument/2006/math" xmlns:a14="http://schemas.microsoft.com/office/drawing/2010/main" xmlns:ma14="http://schemas.microsoft.com/office/mac/drawingml/2011/main" val="1"/>
-            </a:ext>
-          </a:extLst>
-        </p:spPr>
-        <p:txBody>
-          <a:bodyPr wrap="none" lIns="35719" tIns="35719" rIns="35719" bIns="35719" numCol="1" anchor="ctr">
-            <a:spAutoFit/>
-          </a:bodyPr>
-          <a:lstStyle>
-            <a:lvl1pPr>
-              <a:defRPr sz="1800"/>
-            </a:lvl1pPr>
-          </a:lstStyle>
-          <a:p>
-            <a:r>
-              <a:rPr sz="1266" dirty="0"/>
-              <a:t>Asset Management</a:t>
-            </a:r>
-          </a:p>
-        </p:txBody>
-      </p:sp>
-      <p:sp>
-        <p:nvSpPr>
-          <p:cNvPr id="23" name="Power Management">
-            <a:extLst>
-              <a:ext uri="{FF2B5EF4-FFF2-40B4-BE49-F238E27FC236}">
-                <a16:creationId xmlns:a16="http://schemas.microsoft.com/office/drawing/2014/main" id="{A981B78F-AA5C-497D-9CB6-13B96E7136D8}"/>
-              </a:ext>
-            </a:extLst>
-          </p:cNvPr>
-          <p:cNvSpPr txBox="1"/>
-          <p:nvPr/>
-        </p:nvSpPr>
-        <p:spPr>
-          <a:xfrm>
-            <a:off x="2859163" y="4386677"/>
-            <a:ext cx="1519648" cy="266933"/>
-          </a:xfrm>
-          <a:prstGeom prst="rect">
-            <a:avLst/>
-          </a:prstGeom>
-          <a:noFill/>
-          <a:ln w="12700" cap="flat">
-            <a:noFill/>
-            <a:miter lim="400000"/>
-          </a:ln>
-          <a:effectLst/>
-          <a:extLst>
-            <a:ext uri="{C572A759-6A51-4108-AA02-DFA0A04FC94B}">
-              <ma14:wrappingTextBoxFlag xmlns="" xmlns:m="http://schemas.openxmlformats.org/officeDocument/2006/math" xmlns:a14="http://schemas.microsoft.com/office/drawing/2010/main" xmlns:ma14="http://schemas.microsoft.com/office/mac/drawingml/2011/main" val="1"/>
-            </a:ext>
-          </a:extLst>
-        </p:spPr>
-        <p:txBody>
-          <a:bodyPr wrap="none" lIns="35719" tIns="35719" rIns="35719" bIns="35719" numCol="1" anchor="ctr">
-            <a:spAutoFit/>
-          </a:bodyPr>
-          <a:lstStyle>
-            <a:lvl1pPr>
-              <a:defRPr sz="1800"/>
-            </a:lvl1pPr>
-          </a:lstStyle>
-          <a:p>
-            <a:r>
-              <a:rPr lang="en-US" sz="1266" dirty="0"/>
-              <a:t>Power</a:t>
-            </a:r>
-            <a:r>
-              <a:rPr sz="1266" dirty="0"/>
-              <a:t> Management</a:t>
-            </a:r>
-          </a:p>
-        </p:txBody>
-      </p:sp>
-      <p:sp>
-        <p:nvSpPr>
-          <p:cNvPr id="24" name="Change Management">
-            <a:extLst>
-              <a:ext uri="{FF2B5EF4-FFF2-40B4-BE49-F238E27FC236}">
-                <a16:creationId xmlns:a16="http://schemas.microsoft.com/office/drawing/2014/main" id="{EAEC5128-BA04-4DD5-959B-54798EDCC76A}"/>
-              </a:ext>
-            </a:extLst>
-          </p:cNvPr>
-          <p:cNvSpPr txBox="1"/>
-          <p:nvPr/>
-        </p:nvSpPr>
-        <p:spPr>
-          <a:xfrm>
-            <a:off x="3424891" y="3823703"/>
-            <a:ext cx="1691169" cy="266933"/>
-          </a:xfrm>
-          <a:prstGeom prst="rect">
-            <a:avLst/>
-          </a:prstGeom>
-          <a:noFill/>
-          <a:ln w="12700" cap="flat">
-            <a:noFill/>
-            <a:miter lim="400000"/>
-          </a:ln>
-          <a:effectLst/>
-          <a:extLst>
-            <a:ext uri="{C572A759-6A51-4108-AA02-DFA0A04FC94B}">
-              <ma14:wrappingTextBoxFlag xmlns="" xmlns:m="http://schemas.openxmlformats.org/officeDocument/2006/math" xmlns:a14="http://schemas.microsoft.com/office/drawing/2010/main" xmlns:ma14="http://schemas.microsoft.com/office/mac/drawingml/2011/main" val="1"/>
-            </a:ext>
-          </a:extLst>
-        </p:spPr>
-        <p:txBody>
-          <a:bodyPr wrap="none" lIns="35719" tIns="35719" rIns="35719" bIns="35719" numCol="1" anchor="ctr">
-            <a:spAutoFit/>
-          </a:bodyPr>
-          <a:lstStyle>
-            <a:lvl1pPr>
-              <a:defRPr sz="1800"/>
-            </a:lvl1pPr>
-          </a:lstStyle>
-          <a:p>
-            <a:r>
-              <a:rPr lang="en-US" sz="1266" dirty="0"/>
-              <a:t>Capacity</a:t>
-            </a:r>
-            <a:r>
-              <a:rPr sz="1266" dirty="0"/>
-              <a:t> Management</a:t>
-            </a:r>
-          </a:p>
-        </p:txBody>
-      </p:sp>
-      <p:sp>
-        <p:nvSpPr>
-          <p:cNvPr id="25" name="Circle">
-            <a:extLst>
-              <a:ext uri="{FF2B5EF4-FFF2-40B4-BE49-F238E27FC236}">
-                <a16:creationId xmlns:a16="http://schemas.microsoft.com/office/drawing/2014/main" id="{A9E30164-C239-4753-98E5-6600B64A7E26}"/>
-              </a:ext>
-            </a:extLst>
-          </p:cNvPr>
-          <p:cNvSpPr/>
-          <p:nvPr/>
-        </p:nvSpPr>
-        <p:spPr>
-          <a:xfrm>
-            <a:off x="3561482" y="3395150"/>
-            <a:ext cx="278607" cy="278607"/>
-          </a:xfrm>
-          <a:prstGeom prst="ellipse">
-            <a:avLst/>
-          </a:prstGeom>
-          <a:solidFill>
-            <a:schemeClr val="accent1">
-              <a:lumOff val="-13575"/>
-            </a:schemeClr>
-          </a:solidFill>
-          <a:ln w="12700" cap="flat">
-            <a:noFill/>
-            <a:miter lim="400000"/>
-          </a:ln>
-          <a:effectLst/>
-        </p:spPr>
-        <p:txBody>
-          <a:bodyPr wrap="square" lIns="35719" tIns="35719" rIns="35719" bIns="35719" numCol="1" anchor="ctr">
-            <a:noAutofit/>
-          </a:bodyPr>
-          <a:lstStyle/>
-          <a:p>
-            <a:pPr>
-              <a:defRPr sz="2200" b="0">
-                <a:solidFill>
-                  <a:srgbClr val="FFFFFF"/>
-                </a:solidFill>
-                <a:latin typeface="+mn-lt"/>
-                <a:ea typeface="+mn-ea"/>
-                <a:cs typeface="+mn-cs"/>
-                <a:sym typeface="Helvetica Neue Medium"/>
-              </a:defRPr>
-            </a:pPr>
-            <a:endParaRPr sz="1547"/>
-          </a:p>
-        </p:txBody>
-      </p:sp>
-      <p:sp>
-        <p:nvSpPr>
-          <p:cNvPr id="26" name="Capacity Management">
-            <a:extLst>
-              <a:ext uri="{FF2B5EF4-FFF2-40B4-BE49-F238E27FC236}">
-                <a16:creationId xmlns:a16="http://schemas.microsoft.com/office/drawing/2014/main" id="{67DAFB54-350C-48DA-859E-6D4AC991E202}"/>
-              </a:ext>
-            </a:extLst>
-          </p:cNvPr>
-          <p:cNvSpPr txBox="1"/>
-          <p:nvPr/>
-        </p:nvSpPr>
-        <p:spPr>
-          <a:xfrm>
-            <a:off x="3766509" y="3560493"/>
-            <a:ext cx="2006961" cy="266933"/>
-          </a:xfrm>
-          <a:prstGeom prst="rect">
-            <a:avLst/>
-          </a:prstGeom>
-          <a:noFill/>
-          <a:ln w="12700" cap="flat">
-            <a:noFill/>
-            <a:miter lim="400000"/>
-          </a:ln>
-          <a:effectLst/>
-          <a:extLst>
-            <a:ext uri="{C572A759-6A51-4108-AA02-DFA0A04FC94B}">
-              <ma14:wrappingTextBoxFlag xmlns="" xmlns:m="http://schemas.openxmlformats.org/officeDocument/2006/math" xmlns:a14="http://schemas.microsoft.com/office/drawing/2010/main" xmlns:ma14="http://schemas.microsoft.com/office/mac/drawingml/2011/main" val="1"/>
-            </a:ext>
-          </a:extLst>
-        </p:spPr>
-        <p:txBody>
-          <a:bodyPr wrap="none" lIns="35719" tIns="35719" rIns="35719" bIns="35719" numCol="1" anchor="ctr">
-            <a:spAutoFit/>
-          </a:bodyPr>
-          <a:lstStyle>
-            <a:lvl1pPr>
-              <a:defRPr sz="1800"/>
-            </a:lvl1pPr>
-          </a:lstStyle>
-          <a:p>
-            <a:r>
-              <a:rPr lang="en-US" sz="1266" dirty="0"/>
-              <a:t>Reservations</a:t>
-            </a:r>
-            <a:r>
-              <a:rPr sz="1266" dirty="0"/>
-              <a:t> Management</a:t>
-            </a:r>
-          </a:p>
-        </p:txBody>
-      </p:sp>
-      <p:sp>
-        <p:nvSpPr>
           <p:cNvPr id="27" name="Business Insights">
             <a:extLst>
               <a:ext uri="{FF2B5EF4-FFF2-40B4-BE49-F238E27FC236}">
@@ -28780,7 +28364,7 @@
           </a:ln>
           <a:extLst>
             <a:ext uri="{C572A759-6A51-4108-AA02-DFA0A04FC94B}">
-              <ma14:wrappingTextBoxFlag xmlns="" xmlns:m="http://schemas.openxmlformats.org/officeDocument/2006/math" xmlns:a14="http://schemas.microsoft.com/office/drawing/2010/main" xmlns:ma14="http://schemas.microsoft.com/office/mac/drawingml/2011/main" val="1"/>
+              <ma14:wrappingTextBoxFlag xmlns:ma14="http://schemas.microsoft.com/office/mac/drawingml/2011/main" xmlns:a14="http://schemas.microsoft.com/office/drawing/2010/main" xmlns:m="http://schemas.openxmlformats.org/officeDocument/2006/math" xmlns="" val="1"/>
             </a:ext>
           </a:extLst>
         </p:spPr>
@@ -28821,8 +28405,8 @@
         </p:nvSpPr>
         <p:spPr>
           <a:xfrm>
-            <a:off x="6601852" y="937796"/>
-            <a:ext cx="1619836" cy="1127006"/>
+            <a:off x="6686009" y="620414"/>
+            <a:ext cx="1673346" cy="1561508"/>
           </a:xfrm>
           <a:prstGeom prst="wedgeEllipseCallout">
             <a:avLst>
@@ -28831,14 +28415,16 @@
             </a:avLst>
           </a:prstGeom>
           <a:solidFill>
-            <a:srgbClr val="C00000"/>
+            <a:schemeClr val="accent3">
+              <a:lumMod val="50000"/>
+            </a:schemeClr>
           </a:solidFill>
           <a:ln w="12700">
             <a:miter lim="400000"/>
           </a:ln>
           <a:extLst>
             <a:ext uri="{C572A759-6A51-4108-AA02-DFA0A04FC94B}">
-              <ma14:wrappingTextBoxFlag xmlns="" xmlns:m="http://schemas.openxmlformats.org/officeDocument/2006/math" xmlns:a14="http://schemas.microsoft.com/office/drawing/2010/main" xmlns:ma14="http://schemas.microsoft.com/office/mac/drawingml/2011/main" val="1"/>
+              <ma14:wrappingTextBoxFlag xmlns:ma14="http://schemas.microsoft.com/office/mac/drawingml/2011/main" xmlns:a14="http://schemas.microsoft.com/office/drawing/2010/main" xmlns:m="http://schemas.openxmlformats.org/officeDocument/2006/math" xmlns="" val="1"/>
             </a:ext>
           </a:extLst>
         </p:spPr>
@@ -28855,7 +28441,7 @@
             </a:pPr>
             <a:r>
               <a:rPr lang="en-US" sz="1547" dirty="0"/>
-              <a:t>Increase process</a:t>
+              <a:t>Increase role-based workflow</a:t>
             </a:r>
             <a:r>
               <a:rPr sz="1547" dirty="0"/>
@@ -28896,7 +28482,7 @@
           </a:ln>
           <a:extLst>
             <a:ext uri="{C572A759-6A51-4108-AA02-DFA0A04FC94B}">
-              <ma14:wrappingTextBoxFlag xmlns="" xmlns:m="http://schemas.openxmlformats.org/officeDocument/2006/math" xmlns:a14="http://schemas.microsoft.com/office/drawing/2010/main" xmlns:ma14="http://schemas.microsoft.com/office/mac/drawingml/2011/main" val="1"/>
+              <ma14:wrappingTextBoxFlag xmlns:ma14="http://schemas.microsoft.com/office/mac/drawingml/2011/main" xmlns:a14="http://schemas.microsoft.com/office/drawing/2010/main" xmlns:m="http://schemas.openxmlformats.org/officeDocument/2006/math" xmlns="" val="1"/>
             </a:ext>
           </a:extLst>
         </p:spPr>
@@ -28918,536 +28504,981 @@
           <a:p>
             <a:r>
               <a:rPr sz="1547" dirty="0"/>
-              <a:t>How do we increase Operational Consistency in order to harvest Business Insights?</a:t>
+              <a:t>How do we increase Operational Consistency </a:t>
+            </a:r>
+            <a:r>
+              <a:rPr lang="en-US" sz="1547" dirty="0"/>
+              <a:t>to gain</a:t>
+            </a:r>
+            <a:r>
+              <a:rPr sz="1547" dirty="0"/>
+              <a:t> Business Insights?</a:t>
             </a:r>
           </a:p>
         </p:txBody>
       </p:sp>
-      <p:sp>
-        <p:nvSpPr>
-          <p:cNvPr id="2" name="Circle">
+      <p:grpSp>
+        <p:nvGrpSpPr>
+          <p:cNvPr id="18" name="Group 17">
             <a:extLst>
               <a:ext uri="{FF2B5EF4-FFF2-40B4-BE49-F238E27FC236}">
-                <a16:creationId xmlns:a16="http://schemas.microsoft.com/office/drawing/2014/main" id="{3FFF68BB-2598-8A40-A217-641D31D58ED0}"/>
+                <a16:creationId xmlns:a16="http://schemas.microsoft.com/office/drawing/2014/main" id="{42232E90-FD18-307F-C33C-7739B2B0FA9C}"/>
               </a:ext>
             </a:extLst>
           </p:cNvPr>
-          <p:cNvSpPr/>
+          <p:cNvGrpSpPr/>
           <p:nvPr/>
-        </p:nvSpPr>
-        <p:spPr>
+        </p:nvGrpSpPr>
+        <p:grpSpPr>
           <a:xfrm>
-            <a:off x="1893382" y="5166157"/>
-            <a:ext cx="278607" cy="278607"/>
+            <a:off x="1893382" y="2967935"/>
+            <a:ext cx="4421857" cy="2719447"/>
+            <a:chOff x="1893382" y="2967935"/>
+            <a:chExt cx="4421857" cy="2719447"/>
           </a:xfrm>
-          <a:prstGeom prst="ellipse">
-            <a:avLst/>
-          </a:prstGeom>
-          <a:solidFill>
-            <a:schemeClr val="accent1">
-              <a:lumOff val="-13575"/>
-            </a:schemeClr>
-          </a:solidFill>
-          <a:ln w="12700" cap="flat">
+        </p:grpSpPr>
+        <p:sp>
+          <p:nvSpPr>
+            <p:cNvPr id="19" name="Circle">
+              <a:extLst>
+                <a:ext uri="{FF2B5EF4-FFF2-40B4-BE49-F238E27FC236}">
+                  <a16:creationId xmlns:a16="http://schemas.microsoft.com/office/drawing/2014/main" id="{B5E651A4-7448-4B5A-ABDE-A052E8A3DA31}"/>
+                </a:ext>
+              </a:extLst>
+            </p:cNvPr>
+            <p:cNvSpPr/>
+            <p:nvPr/>
+          </p:nvSpPr>
+          <p:spPr>
+            <a:xfrm>
+              <a:off x="2114995" y="4825145"/>
+              <a:ext cx="278607" cy="278607"/>
+            </a:xfrm>
+            <a:prstGeom prst="ellipse">
+              <a:avLst/>
+            </a:prstGeom>
+            <a:solidFill>
+              <a:schemeClr val="accent1">
+                <a:lumOff val="-13575"/>
+              </a:schemeClr>
+            </a:solidFill>
+            <a:ln w="12700" cap="flat">
+              <a:noFill/>
+              <a:miter lim="400000"/>
+            </a:ln>
+            <a:effectLst/>
+          </p:spPr>
+          <p:txBody>
+            <a:bodyPr wrap="square" lIns="35719" tIns="35719" rIns="35719" bIns="35719" numCol="1" anchor="ctr">
+              <a:noAutofit/>
+            </a:bodyPr>
+            <a:lstStyle/>
+            <a:p>
+              <a:pPr>
+                <a:defRPr sz="2200" b="0">
+                  <a:solidFill>
+                    <a:srgbClr val="27FF3B"/>
+                  </a:solidFill>
+                  <a:latin typeface="+mn-lt"/>
+                  <a:ea typeface="+mn-ea"/>
+                  <a:cs typeface="+mn-cs"/>
+                  <a:sym typeface="Helvetica Neue Medium"/>
+                </a:defRPr>
+              </a:pPr>
+              <a:endParaRPr sz="1547"/>
+            </a:p>
+          </p:txBody>
+        </p:sp>
+        <p:sp>
+          <p:nvSpPr>
+            <p:cNvPr id="20" name="Circle">
+              <a:extLst>
+                <a:ext uri="{FF2B5EF4-FFF2-40B4-BE49-F238E27FC236}">
+                  <a16:creationId xmlns:a16="http://schemas.microsoft.com/office/drawing/2014/main" id="{1E120C94-34DE-4A30-B3D9-A39664CCBDB0}"/>
+                </a:ext>
+              </a:extLst>
+            </p:cNvPr>
+            <p:cNvSpPr/>
+            <p:nvPr/>
+          </p:nvSpPr>
+          <p:spPr>
+            <a:xfrm>
+              <a:off x="2610230" y="4200593"/>
+              <a:ext cx="278607" cy="278607"/>
+            </a:xfrm>
+            <a:prstGeom prst="ellipse">
+              <a:avLst/>
+            </a:prstGeom>
+            <a:solidFill>
+              <a:schemeClr val="accent1">
+                <a:lumOff val="-13575"/>
+              </a:schemeClr>
+            </a:solidFill>
+            <a:ln w="12700" cap="flat">
+              <a:noFill/>
+              <a:miter lim="400000"/>
+            </a:ln>
+            <a:effectLst/>
+          </p:spPr>
+          <p:txBody>
+            <a:bodyPr wrap="square" lIns="35719" tIns="35719" rIns="35719" bIns="35719" numCol="1" anchor="ctr">
+              <a:noAutofit/>
+            </a:bodyPr>
+            <a:lstStyle/>
+            <a:p>
+              <a:pPr>
+                <a:defRPr sz="2200" b="0">
+                  <a:solidFill>
+                    <a:srgbClr val="FFFFFF"/>
+                  </a:solidFill>
+                  <a:latin typeface="+mn-lt"/>
+                  <a:ea typeface="+mn-ea"/>
+                  <a:cs typeface="+mn-cs"/>
+                  <a:sym typeface="Helvetica Neue Medium"/>
+                </a:defRPr>
+              </a:pPr>
+              <a:endParaRPr sz="1547"/>
+            </a:p>
+          </p:txBody>
+        </p:sp>
+        <p:sp>
+          <p:nvSpPr>
+            <p:cNvPr id="21" name="Circle">
+              <a:extLst>
+                <a:ext uri="{FF2B5EF4-FFF2-40B4-BE49-F238E27FC236}">
+                  <a16:creationId xmlns:a16="http://schemas.microsoft.com/office/drawing/2014/main" id="{09A208D5-7094-4229-8739-E32B90EE8819}"/>
+                </a:ext>
+              </a:extLst>
+            </p:cNvPr>
+            <p:cNvSpPr/>
+            <p:nvPr/>
+          </p:nvSpPr>
+          <p:spPr>
+            <a:xfrm>
+              <a:off x="3179307" y="3673757"/>
+              <a:ext cx="278607" cy="278607"/>
+            </a:xfrm>
+            <a:prstGeom prst="ellipse">
+              <a:avLst/>
+            </a:prstGeom>
+            <a:solidFill>
+              <a:schemeClr val="accent1">
+                <a:lumOff val="-13575"/>
+              </a:schemeClr>
+            </a:solidFill>
+            <a:ln w="12700" cap="flat">
+              <a:noFill/>
+              <a:miter lim="400000"/>
+            </a:ln>
+            <a:effectLst/>
+          </p:spPr>
+          <p:txBody>
+            <a:bodyPr wrap="square" lIns="35719" tIns="35719" rIns="35719" bIns="35719" numCol="1" anchor="ctr">
+              <a:noAutofit/>
+            </a:bodyPr>
+            <a:lstStyle/>
+            <a:p>
+              <a:pPr>
+                <a:defRPr sz="2200" b="0">
+                  <a:solidFill>
+                    <a:srgbClr val="FFFFFF"/>
+                  </a:solidFill>
+                  <a:latin typeface="+mn-lt"/>
+                  <a:ea typeface="+mn-ea"/>
+                  <a:cs typeface="+mn-cs"/>
+                  <a:sym typeface="Helvetica Neue Medium"/>
+                </a:defRPr>
+              </a:pPr>
+              <a:endParaRPr sz="1547"/>
+            </a:p>
+          </p:txBody>
+        </p:sp>
+        <p:sp>
+          <p:nvSpPr>
+            <p:cNvPr id="22" name="Asset Management">
+              <a:extLst>
+                <a:ext uri="{FF2B5EF4-FFF2-40B4-BE49-F238E27FC236}">
+                  <a16:creationId xmlns:a16="http://schemas.microsoft.com/office/drawing/2014/main" id="{1BB2D682-B728-4CCD-B1CB-7B58247E944B}"/>
+                </a:ext>
+              </a:extLst>
+            </p:cNvPr>
+            <p:cNvSpPr txBox="1"/>
+            <p:nvPr/>
+          </p:nvSpPr>
+          <p:spPr>
+            <a:xfrm>
+              <a:off x="2328643" y="5020203"/>
+              <a:ext cx="1350819" cy="266933"/>
+            </a:xfrm>
+            <a:prstGeom prst="rect">
+              <a:avLst/>
+            </a:prstGeom>
             <a:noFill/>
-            <a:miter lim="400000"/>
-          </a:ln>
-          <a:effectLst/>
-        </p:spPr>
-        <p:txBody>
-          <a:bodyPr wrap="square" lIns="35719" tIns="35719" rIns="35719" bIns="35719" numCol="1" anchor="ctr">
-            <a:noAutofit/>
-          </a:bodyPr>
-          <a:lstStyle/>
-          <a:p>
-            <a:pPr>
-              <a:defRPr sz="2200" b="0">
-                <a:solidFill>
-                  <a:srgbClr val="27FF3B"/>
-                </a:solidFill>
-                <a:latin typeface="+mn-lt"/>
-                <a:ea typeface="+mn-ea"/>
-                <a:cs typeface="+mn-cs"/>
-                <a:sym typeface="Helvetica Neue Medium"/>
-              </a:defRPr>
-            </a:pPr>
-            <a:endParaRPr sz="1547"/>
-          </a:p>
-        </p:txBody>
-      </p:sp>
-      <p:sp>
-        <p:nvSpPr>
-          <p:cNvPr id="3" name="Asset Management">
+            <a:ln w="12700" cap="flat">
+              <a:noFill/>
+              <a:miter lim="400000"/>
+            </a:ln>
+            <a:effectLst/>
             <a:extLst>
-              <a:ext uri="{FF2B5EF4-FFF2-40B4-BE49-F238E27FC236}">
-                <a16:creationId xmlns:a16="http://schemas.microsoft.com/office/drawing/2014/main" id="{325B5B4B-D5D0-6536-5E83-D0BAB1221A40}"/>
+              <a:ext uri="{C572A759-6A51-4108-AA02-DFA0A04FC94B}">
+                <ma14:wrappingTextBoxFlag xmlns:ma14="http://schemas.microsoft.com/office/mac/drawingml/2011/main" xmlns:a14="http://schemas.microsoft.com/office/drawing/2010/main" xmlns:m="http://schemas.openxmlformats.org/officeDocument/2006/math" xmlns="" val="1"/>
               </a:ext>
             </a:extLst>
-          </p:cNvPr>
-          <p:cNvSpPr txBox="1"/>
-          <p:nvPr/>
-        </p:nvSpPr>
-        <p:spPr>
-          <a:xfrm>
-            <a:off x="1987242" y="5420449"/>
-            <a:ext cx="1340111" cy="266933"/>
-          </a:xfrm>
-          <a:prstGeom prst="rect">
-            <a:avLst/>
-          </a:prstGeom>
-          <a:noFill/>
-          <a:ln w="12700" cap="flat">
+          </p:spPr>
+          <p:txBody>
+            <a:bodyPr wrap="none" lIns="35719" tIns="35719" rIns="35719" bIns="35719" numCol="1" anchor="ctr">
+              <a:spAutoFit/>
+            </a:bodyPr>
+            <a:lstStyle>
+              <a:lvl1pPr>
+                <a:defRPr sz="1800"/>
+              </a:lvl1pPr>
+            </a:lstStyle>
+            <a:p>
+              <a:r>
+                <a:rPr sz="1266" dirty="0"/>
+                <a:t>Asset Management</a:t>
+              </a:r>
+            </a:p>
+          </p:txBody>
+        </p:sp>
+        <p:sp>
+          <p:nvSpPr>
+            <p:cNvPr id="23" name="Power Management">
+              <a:extLst>
+                <a:ext uri="{FF2B5EF4-FFF2-40B4-BE49-F238E27FC236}">
+                  <a16:creationId xmlns:a16="http://schemas.microsoft.com/office/drawing/2014/main" id="{A981B78F-AA5C-497D-9CB6-13B96E7136D8}"/>
+                </a:ext>
+              </a:extLst>
+            </p:cNvPr>
+            <p:cNvSpPr txBox="1"/>
+            <p:nvPr/>
+          </p:nvSpPr>
+          <p:spPr>
+            <a:xfrm>
+              <a:off x="2859163" y="4386677"/>
+              <a:ext cx="1519648" cy="266933"/>
+            </a:xfrm>
+            <a:prstGeom prst="rect">
+              <a:avLst/>
+            </a:prstGeom>
             <a:noFill/>
-            <a:miter lim="400000"/>
-          </a:ln>
-          <a:effectLst/>
-          <a:extLst>
-            <a:ext uri="{C572A759-6A51-4108-AA02-DFA0A04FC94B}">
-              <ma14:wrappingTextBoxFlag xmlns="" xmlns:m="http://schemas.openxmlformats.org/officeDocument/2006/math" xmlns:a14="http://schemas.microsoft.com/office/drawing/2010/main" xmlns:ma14="http://schemas.microsoft.com/office/mac/drawingml/2011/main" val="1"/>
-            </a:ext>
-          </a:extLst>
-        </p:spPr>
-        <p:txBody>
-          <a:bodyPr wrap="none" lIns="35719" tIns="35719" rIns="35719" bIns="35719" numCol="1" anchor="ctr">
-            <a:spAutoFit/>
-          </a:bodyPr>
-          <a:lstStyle>
-            <a:lvl1pPr>
-              <a:defRPr sz="1800"/>
-            </a:lvl1pPr>
-          </a:lstStyle>
-          <a:p>
-            <a:r>
-              <a:rPr lang="en-US" sz="1266" dirty="0"/>
-              <a:t>Site</a:t>
-            </a:r>
-            <a:r>
-              <a:rPr sz="1266" dirty="0"/>
-              <a:t> Management</a:t>
-            </a:r>
-          </a:p>
-        </p:txBody>
-      </p:sp>
-      <p:sp>
-        <p:nvSpPr>
-          <p:cNvPr id="4" name="Circle">
+            <a:ln w="12700" cap="flat">
+              <a:noFill/>
+              <a:miter lim="400000"/>
+            </a:ln>
+            <a:effectLst/>
             <a:extLst>
-              <a:ext uri="{FF2B5EF4-FFF2-40B4-BE49-F238E27FC236}">
-                <a16:creationId xmlns:a16="http://schemas.microsoft.com/office/drawing/2014/main" id="{B46325D9-7AEF-DAC2-CC62-43B861B5EB96}"/>
+              <a:ext uri="{C572A759-6A51-4108-AA02-DFA0A04FC94B}">
+                <ma14:wrappingTextBoxFlag xmlns:ma14="http://schemas.microsoft.com/office/mac/drawingml/2011/main" xmlns:a14="http://schemas.microsoft.com/office/drawing/2010/main" xmlns:m="http://schemas.openxmlformats.org/officeDocument/2006/math" xmlns="" val="1"/>
               </a:ext>
             </a:extLst>
-          </p:cNvPr>
-          <p:cNvSpPr/>
-          <p:nvPr/>
-        </p:nvSpPr>
-        <p:spPr>
-          <a:xfrm>
-            <a:off x="2344579" y="4510187"/>
-            <a:ext cx="278607" cy="278607"/>
-          </a:xfrm>
-          <a:prstGeom prst="ellipse">
-            <a:avLst/>
-          </a:prstGeom>
-          <a:solidFill>
-            <a:schemeClr val="accent1">
-              <a:lumOff val="-13575"/>
-            </a:schemeClr>
-          </a:solidFill>
-          <a:ln w="12700" cap="flat">
+          </p:spPr>
+          <p:txBody>
+            <a:bodyPr wrap="none" lIns="35719" tIns="35719" rIns="35719" bIns="35719" numCol="1" anchor="ctr">
+              <a:spAutoFit/>
+            </a:bodyPr>
+            <a:lstStyle>
+              <a:lvl1pPr>
+                <a:defRPr sz="1800"/>
+              </a:lvl1pPr>
+            </a:lstStyle>
+            <a:p>
+              <a:r>
+                <a:rPr lang="en-US" sz="1266" dirty="0"/>
+                <a:t>Power</a:t>
+              </a:r>
+              <a:r>
+                <a:rPr sz="1266" dirty="0"/>
+                <a:t> Management</a:t>
+              </a:r>
+            </a:p>
+          </p:txBody>
+        </p:sp>
+        <p:sp>
+          <p:nvSpPr>
+            <p:cNvPr id="24" name="Change Management">
+              <a:extLst>
+                <a:ext uri="{FF2B5EF4-FFF2-40B4-BE49-F238E27FC236}">
+                  <a16:creationId xmlns:a16="http://schemas.microsoft.com/office/drawing/2014/main" id="{EAEC5128-BA04-4DD5-959B-54798EDCC76A}"/>
+                </a:ext>
+              </a:extLst>
+            </p:cNvPr>
+            <p:cNvSpPr txBox="1"/>
+            <p:nvPr/>
+          </p:nvSpPr>
+          <p:spPr>
+            <a:xfrm>
+              <a:off x="3424891" y="3823703"/>
+              <a:ext cx="1691169" cy="266933"/>
+            </a:xfrm>
+            <a:prstGeom prst="rect">
+              <a:avLst/>
+            </a:prstGeom>
             <a:noFill/>
-            <a:miter lim="400000"/>
-          </a:ln>
-          <a:effectLst/>
-        </p:spPr>
-        <p:txBody>
-          <a:bodyPr wrap="square" lIns="35719" tIns="35719" rIns="35719" bIns="35719" numCol="1" anchor="ctr">
-            <a:noAutofit/>
-          </a:bodyPr>
-          <a:lstStyle/>
-          <a:p>
-            <a:pPr>
-              <a:defRPr sz="2200" b="0">
-                <a:solidFill>
-                  <a:srgbClr val="FFFFFF"/>
-                </a:solidFill>
-                <a:latin typeface="+mn-lt"/>
-                <a:ea typeface="+mn-ea"/>
-                <a:cs typeface="+mn-cs"/>
-                <a:sym typeface="Helvetica Neue Medium"/>
-              </a:defRPr>
-            </a:pPr>
-            <a:endParaRPr sz="1547"/>
-          </a:p>
-        </p:txBody>
-      </p:sp>
-      <p:sp>
-        <p:nvSpPr>
-          <p:cNvPr id="30" name="Power Management">
+            <a:ln w="12700" cap="flat">
+              <a:noFill/>
+              <a:miter lim="400000"/>
+            </a:ln>
+            <a:effectLst/>
             <a:extLst>
-              <a:ext uri="{FF2B5EF4-FFF2-40B4-BE49-F238E27FC236}">
-                <a16:creationId xmlns:a16="http://schemas.microsoft.com/office/drawing/2014/main" id="{ABDC91F3-FBBA-E3C8-251F-5311E9DBBCBF}"/>
+              <a:ext uri="{C572A759-6A51-4108-AA02-DFA0A04FC94B}">
+                <ma14:wrappingTextBoxFlag xmlns:ma14="http://schemas.microsoft.com/office/mac/drawingml/2011/main" xmlns:a14="http://schemas.microsoft.com/office/drawing/2010/main" xmlns:m="http://schemas.openxmlformats.org/officeDocument/2006/math" xmlns="" val="1"/>
               </a:ext>
             </a:extLst>
-          </p:cNvPr>
-          <p:cNvSpPr txBox="1"/>
-          <p:nvPr/>
-        </p:nvSpPr>
-        <p:spPr>
-          <a:xfrm>
-            <a:off x="2524790" y="4688738"/>
-            <a:ext cx="2068131" cy="266933"/>
-          </a:xfrm>
-          <a:prstGeom prst="rect">
-            <a:avLst/>
-          </a:prstGeom>
-          <a:noFill/>
-          <a:ln w="12700" cap="flat">
+          </p:spPr>
+          <p:txBody>
+            <a:bodyPr wrap="none" lIns="35719" tIns="35719" rIns="35719" bIns="35719" numCol="1" anchor="ctr">
+              <a:spAutoFit/>
+            </a:bodyPr>
+            <a:lstStyle>
+              <a:lvl1pPr>
+                <a:defRPr sz="1800"/>
+              </a:lvl1pPr>
+            </a:lstStyle>
+            <a:p>
+              <a:r>
+                <a:rPr lang="en-US" sz="1266" dirty="0"/>
+                <a:t>Capacity</a:t>
+              </a:r>
+              <a:r>
+                <a:rPr sz="1266" dirty="0"/>
+                <a:t> Management</a:t>
+              </a:r>
+            </a:p>
+          </p:txBody>
+        </p:sp>
+        <p:sp>
+          <p:nvSpPr>
+            <p:cNvPr id="25" name="Circle">
+              <a:extLst>
+                <a:ext uri="{FF2B5EF4-FFF2-40B4-BE49-F238E27FC236}">
+                  <a16:creationId xmlns:a16="http://schemas.microsoft.com/office/drawing/2014/main" id="{A9E30164-C239-4753-98E5-6600B64A7E26}"/>
+                </a:ext>
+              </a:extLst>
+            </p:cNvPr>
+            <p:cNvSpPr/>
+            <p:nvPr/>
+          </p:nvSpPr>
+          <p:spPr>
+            <a:xfrm>
+              <a:off x="3561482" y="3395150"/>
+              <a:ext cx="278607" cy="278607"/>
+            </a:xfrm>
+            <a:prstGeom prst="ellipse">
+              <a:avLst/>
+            </a:prstGeom>
+            <a:solidFill>
+              <a:schemeClr val="accent1">
+                <a:lumOff val="-13575"/>
+              </a:schemeClr>
+            </a:solidFill>
+            <a:ln w="12700" cap="flat">
+              <a:noFill/>
+              <a:miter lim="400000"/>
+            </a:ln>
+            <a:effectLst/>
+          </p:spPr>
+          <p:txBody>
+            <a:bodyPr wrap="square" lIns="35719" tIns="35719" rIns="35719" bIns="35719" numCol="1" anchor="ctr">
+              <a:noAutofit/>
+            </a:bodyPr>
+            <a:lstStyle/>
+            <a:p>
+              <a:pPr>
+                <a:defRPr sz="2200" b="0">
+                  <a:solidFill>
+                    <a:srgbClr val="FFFFFF"/>
+                  </a:solidFill>
+                  <a:latin typeface="+mn-lt"/>
+                  <a:ea typeface="+mn-ea"/>
+                  <a:cs typeface="+mn-cs"/>
+                  <a:sym typeface="Helvetica Neue Medium"/>
+                </a:defRPr>
+              </a:pPr>
+              <a:endParaRPr sz="1547"/>
+            </a:p>
+          </p:txBody>
+        </p:sp>
+        <p:sp>
+          <p:nvSpPr>
+            <p:cNvPr id="26" name="Capacity Management">
+              <a:extLst>
+                <a:ext uri="{FF2B5EF4-FFF2-40B4-BE49-F238E27FC236}">
+                  <a16:creationId xmlns:a16="http://schemas.microsoft.com/office/drawing/2014/main" id="{67DAFB54-350C-48DA-859E-6D4AC991E202}"/>
+                </a:ext>
+              </a:extLst>
+            </p:cNvPr>
+            <p:cNvSpPr txBox="1"/>
+            <p:nvPr/>
+          </p:nvSpPr>
+          <p:spPr>
+            <a:xfrm>
+              <a:off x="3766509" y="3560493"/>
+              <a:ext cx="2006961" cy="266933"/>
+            </a:xfrm>
+            <a:prstGeom prst="rect">
+              <a:avLst/>
+            </a:prstGeom>
             <a:noFill/>
-            <a:miter lim="400000"/>
-          </a:ln>
-          <a:effectLst/>
-          <a:extLst>
-            <a:ext uri="{C572A759-6A51-4108-AA02-DFA0A04FC94B}">
-              <ma14:wrappingTextBoxFlag xmlns="" xmlns:m="http://schemas.openxmlformats.org/officeDocument/2006/math" xmlns:a14="http://schemas.microsoft.com/office/drawing/2010/main" xmlns:ma14="http://schemas.microsoft.com/office/mac/drawingml/2011/main" val="1"/>
-            </a:ext>
-          </a:extLst>
-        </p:spPr>
-        <p:txBody>
-          <a:bodyPr wrap="none" lIns="35719" tIns="35719" rIns="35719" bIns="35719" numCol="1" anchor="ctr">
-            <a:spAutoFit/>
-          </a:bodyPr>
-          <a:lstStyle>
-            <a:lvl1pPr>
-              <a:defRPr sz="1800"/>
-            </a:lvl1pPr>
-          </a:lstStyle>
-          <a:p>
-            <a:r>
-              <a:rPr lang="en-US" sz="1266" dirty="0"/>
-              <a:t>Ops-Workflow</a:t>
-            </a:r>
-            <a:r>
-              <a:rPr sz="1266" dirty="0"/>
-              <a:t> Management</a:t>
-            </a:r>
-          </a:p>
-        </p:txBody>
-      </p:sp>
-      <p:sp>
-        <p:nvSpPr>
-          <p:cNvPr id="31" name="Circle">
+            <a:ln w="12700" cap="flat">
+              <a:noFill/>
+              <a:miter lim="400000"/>
+            </a:ln>
+            <a:effectLst/>
             <a:extLst>
-              <a:ext uri="{FF2B5EF4-FFF2-40B4-BE49-F238E27FC236}">
-                <a16:creationId xmlns:a16="http://schemas.microsoft.com/office/drawing/2014/main" id="{EB725876-4F35-C8FB-3139-9639EA699971}"/>
+              <a:ext uri="{C572A759-6A51-4108-AA02-DFA0A04FC94B}">
+                <ma14:wrappingTextBoxFlag xmlns:ma14="http://schemas.microsoft.com/office/mac/drawingml/2011/main" xmlns:a14="http://schemas.microsoft.com/office/drawing/2010/main" xmlns:m="http://schemas.openxmlformats.org/officeDocument/2006/math" xmlns="" val="1"/>
               </a:ext>
             </a:extLst>
-          </p:cNvPr>
-          <p:cNvSpPr/>
-          <p:nvPr/>
-        </p:nvSpPr>
-        <p:spPr>
-          <a:xfrm>
-            <a:off x="2869105" y="3936318"/>
-            <a:ext cx="278607" cy="278607"/>
-          </a:xfrm>
-          <a:prstGeom prst="ellipse">
-            <a:avLst/>
-          </a:prstGeom>
-          <a:solidFill>
-            <a:schemeClr val="accent1">
-              <a:lumOff val="-13575"/>
-            </a:schemeClr>
-          </a:solidFill>
-          <a:ln w="12700" cap="flat">
+          </p:spPr>
+          <p:txBody>
+            <a:bodyPr wrap="none" lIns="35719" tIns="35719" rIns="35719" bIns="35719" numCol="1" anchor="ctr">
+              <a:spAutoFit/>
+            </a:bodyPr>
+            <a:lstStyle>
+              <a:lvl1pPr>
+                <a:defRPr sz="1800"/>
+              </a:lvl1pPr>
+            </a:lstStyle>
+            <a:p>
+              <a:r>
+                <a:rPr lang="en-US" sz="1266" dirty="0"/>
+                <a:t>Reservations</a:t>
+              </a:r>
+              <a:r>
+                <a:rPr sz="1266" dirty="0"/>
+                <a:t> Management</a:t>
+              </a:r>
+            </a:p>
+          </p:txBody>
+        </p:sp>
+        <p:sp>
+          <p:nvSpPr>
+            <p:cNvPr id="2" name="Circle">
+              <a:extLst>
+                <a:ext uri="{FF2B5EF4-FFF2-40B4-BE49-F238E27FC236}">
+                  <a16:creationId xmlns:a16="http://schemas.microsoft.com/office/drawing/2014/main" id="{3FFF68BB-2598-8A40-A217-641D31D58ED0}"/>
+                </a:ext>
+              </a:extLst>
+            </p:cNvPr>
+            <p:cNvSpPr/>
+            <p:nvPr/>
+          </p:nvSpPr>
+          <p:spPr>
+            <a:xfrm>
+              <a:off x="1893382" y="5166157"/>
+              <a:ext cx="278607" cy="278607"/>
+            </a:xfrm>
+            <a:prstGeom prst="ellipse">
+              <a:avLst/>
+            </a:prstGeom>
+            <a:solidFill>
+              <a:schemeClr val="accent1">
+                <a:lumOff val="-13575"/>
+              </a:schemeClr>
+            </a:solidFill>
+            <a:ln w="12700" cap="flat">
+              <a:noFill/>
+              <a:miter lim="400000"/>
+            </a:ln>
+            <a:effectLst/>
+          </p:spPr>
+          <p:txBody>
+            <a:bodyPr wrap="square" lIns="35719" tIns="35719" rIns="35719" bIns="35719" numCol="1" anchor="ctr">
+              <a:noAutofit/>
+            </a:bodyPr>
+            <a:lstStyle/>
+            <a:p>
+              <a:pPr>
+                <a:defRPr sz="2200" b="0">
+                  <a:solidFill>
+                    <a:srgbClr val="27FF3B"/>
+                  </a:solidFill>
+                  <a:latin typeface="+mn-lt"/>
+                  <a:ea typeface="+mn-ea"/>
+                  <a:cs typeface="+mn-cs"/>
+                  <a:sym typeface="Helvetica Neue Medium"/>
+                </a:defRPr>
+              </a:pPr>
+              <a:endParaRPr sz="1547"/>
+            </a:p>
+          </p:txBody>
+        </p:sp>
+        <p:sp>
+          <p:nvSpPr>
+            <p:cNvPr id="3" name="Asset Management">
+              <a:extLst>
+                <a:ext uri="{FF2B5EF4-FFF2-40B4-BE49-F238E27FC236}">
+                  <a16:creationId xmlns:a16="http://schemas.microsoft.com/office/drawing/2014/main" id="{325B5B4B-D5D0-6536-5E83-D0BAB1221A40}"/>
+                </a:ext>
+              </a:extLst>
+            </p:cNvPr>
+            <p:cNvSpPr txBox="1"/>
+            <p:nvPr/>
+          </p:nvSpPr>
+          <p:spPr>
+            <a:xfrm>
+              <a:off x="1987242" y="5420449"/>
+              <a:ext cx="1340111" cy="266933"/>
+            </a:xfrm>
+            <a:prstGeom prst="rect">
+              <a:avLst/>
+            </a:prstGeom>
             <a:noFill/>
-            <a:miter lim="400000"/>
-          </a:ln>
-          <a:effectLst/>
-        </p:spPr>
-        <p:txBody>
-          <a:bodyPr wrap="square" lIns="35719" tIns="35719" rIns="35719" bIns="35719" numCol="1" anchor="ctr">
-            <a:noAutofit/>
-          </a:bodyPr>
-          <a:lstStyle/>
-          <a:p>
-            <a:pPr>
-              <a:defRPr sz="2200" b="0">
-                <a:solidFill>
-                  <a:srgbClr val="FFFFFF"/>
-                </a:solidFill>
-                <a:latin typeface="+mn-lt"/>
-                <a:ea typeface="+mn-ea"/>
-                <a:cs typeface="+mn-cs"/>
-                <a:sym typeface="Helvetica Neue Medium"/>
-              </a:defRPr>
-            </a:pPr>
-            <a:endParaRPr sz="1547"/>
-          </a:p>
-        </p:txBody>
-      </p:sp>
-      <p:sp>
-        <p:nvSpPr>
-          <p:cNvPr id="32" name="Change Management">
+            <a:ln w="12700" cap="flat">
+              <a:noFill/>
+              <a:miter lim="400000"/>
+            </a:ln>
+            <a:effectLst/>
             <a:extLst>
-              <a:ext uri="{FF2B5EF4-FFF2-40B4-BE49-F238E27FC236}">
-                <a16:creationId xmlns:a16="http://schemas.microsoft.com/office/drawing/2014/main" id="{02B9B3DA-2D88-D9EC-BF26-85634FBBF65D}"/>
+              <a:ext uri="{C572A759-6A51-4108-AA02-DFA0A04FC94B}">
+                <ma14:wrappingTextBoxFlag xmlns:ma14="http://schemas.microsoft.com/office/mac/drawingml/2011/main" xmlns:a14="http://schemas.microsoft.com/office/drawing/2010/main" xmlns:m="http://schemas.openxmlformats.org/officeDocument/2006/math" xmlns="" val="1"/>
               </a:ext>
             </a:extLst>
-          </p:cNvPr>
-          <p:cNvSpPr txBox="1"/>
-          <p:nvPr/>
-        </p:nvSpPr>
-        <p:spPr>
-          <a:xfrm>
-            <a:off x="3114689" y="4086264"/>
-            <a:ext cx="2122377" cy="266933"/>
-          </a:xfrm>
-          <a:prstGeom prst="rect">
-            <a:avLst/>
-          </a:prstGeom>
-          <a:noFill/>
-          <a:ln w="12700" cap="flat">
+          </p:spPr>
+          <p:txBody>
+            <a:bodyPr wrap="none" lIns="35719" tIns="35719" rIns="35719" bIns="35719" numCol="1" anchor="ctr">
+              <a:spAutoFit/>
+            </a:bodyPr>
+            <a:lstStyle>
+              <a:lvl1pPr>
+                <a:defRPr sz="1800"/>
+              </a:lvl1pPr>
+            </a:lstStyle>
+            <a:p>
+              <a:r>
+                <a:rPr lang="en-US" sz="1266" dirty="0"/>
+                <a:t>Site</a:t>
+              </a:r>
+              <a:r>
+                <a:rPr sz="1266" dirty="0"/>
+                <a:t> Management</a:t>
+              </a:r>
+            </a:p>
+          </p:txBody>
+        </p:sp>
+        <p:sp>
+          <p:nvSpPr>
+            <p:cNvPr id="4" name="Circle">
+              <a:extLst>
+                <a:ext uri="{FF2B5EF4-FFF2-40B4-BE49-F238E27FC236}">
+                  <a16:creationId xmlns:a16="http://schemas.microsoft.com/office/drawing/2014/main" id="{B46325D9-7AEF-DAC2-CC62-43B861B5EB96}"/>
+                </a:ext>
+              </a:extLst>
+            </p:cNvPr>
+            <p:cNvSpPr/>
+            <p:nvPr/>
+          </p:nvSpPr>
+          <p:spPr>
+            <a:xfrm>
+              <a:off x="2344579" y="4510187"/>
+              <a:ext cx="278607" cy="278607"/>
+            </a:xfrm>
+            <a:prstGeom prst="ellipse">
+              <a:avLst/>
+            </a:prstGeom>
+            <a:solidFill>
+              <a:schemeClr val="accent1">
+                <a:lumOff val="-13575"/>
+              </a:schemeClr>
+            </a:solidFill>
+            <a:ln w="12700" cap="flat">
+              <a:noFill/>
+              <a:miter lim="400000"/>
+            </a:ln>
+            <a:effectLst/>
+          </p:spPr>
+          <p:txBody>
+            <a:bodyPr wrap="square" lIns="35719" tIns="35719" rIns="35719" bIns="35719" numCol="1" anchor="ctr">
+              <a:noAutofit/>
+            </a:bodyPr>
+            <a:lstStyle/>
+            <a:p>
+              <a:pPr>
+                <a:defRPr sz="2200" b="0">
+                  <a:solidFill>
+                    <a:srgbClr val="FFFFFF"/>
+                  </a:solidFill>
+                  <a:latin typeface="+mn-lt"/>
+                  <a:ea typeface="+mn-ea"/>
+                  <a:cs typeface="+mn-cs"/>
+                  <a:sym typeface="Helvetica Neue Medium"/>
+                </a:defRPr>
+              </a:pPr>
+              <a:endParaRPr sz="1547"/>
+            </a:p>
+          </p:txBody>
+        </p:sp>
+        <p:sp>
+          <p:nvSpPr>
+            <p:cNvPr id="30" name="Power Management">
+              <a:extLst>
+                <a:ext uri="{FF2B5EF4-FFF2-40B4-BE49-F238E27FC236}">
+                  <a16:creationId xmlns:a16="http://schemas.microsoft.com/office/drawing/2014/main" id="{ABDC91F3-FBBA-E3C8-251F-5311E9DBBCBF}"/>
+                </a:ext>
+              </a:extLst>
+            </p:cNvPr>
+            <p:cNvSpPr txBox="1"/>
+            <p:nvPr/>
+          </p:nvSpPr>
+          <p:spPr>
+            <a:xfrm>
+              <a:off x="2524790" y="4688738"/>
+              <a:ext cx="2068131" cy="266933"/>
+            </a:xfrm>
+            <a:prstGeom prst="rect">
+              <a:avLst/>
+            </a:prstGeom>
             <a:noFill/>
-            <a:miter lim="400000"/>
-          </a:ln>
-          <a:effectLst/>
-          <a:extLst>
-            <a:ext uri="{C572A759-6A51-4108-AA02-DFA0A04FC94B}">
-              <ma14:wrappingTextBoxFlag xmlns="" xmlns:m="http://schemas.openxmlformats.org/officeDocument/2006/math" xmlns:a14="http://schemas.microsoft.com/office/drawing/2010/main" xmlns:ma14="http://schemas.microsoft.com/office/mac/drawingml/2011/main" val="1"/>
-            </a:ext>
-          </a:extLst>
-        </p:spPr>
-        <p:txBody>
-          <a:bodyPr wrap="none" lIns="35719" tIns="35719" rIns="35719" bIns="35719" numCol="1" anchor="ctr">
-            <a:spAutoFit/>
-          </a:bodyPr>
-          <a:lstStyle>
-            <a:lvl1pPr>
-              <a:defRPr sz="1800"/>
-            </a:lvl1pPr>
-          </a:lstStyle>
-          <a:p>
-            <a:r>
-              <a:rPr lang="en-US" sz="1266" dirty="0"/>
-              <a:t>Cable/Network </a:t>
-            </a:r>
-            <a:r>
-              <a:rPr sz="1266" dirty="0"/>
-              <a:t>Management</a:t>
-            </a:r>
-          </a:p>
-        </p:txBody>
-      </p:sp>
-      <p:sp>
-        <p:nvSpPr>
-          <p:cNvPr id="33" name="Circle">
+            <a:ln w="12700" cap="flat">
+              <a:noFill/>
+              <a:miter lim="400000"/>
+            </a:ln>
+            <a:effectLst/>
             <a:extLst>
-              <a:ext uri="{FF2B5EF4-FFF2-40B4-BE49-F238E27FC236}">
-                <a16:creationId xmlns:a16="http://schemas.microsoft.com/office/drawing/2014/main" id="{AFA1A323-C279-62F1-A16F-214DF194514D}"/>
+              <a:ext uri="{C572A759-6A51-4108-AA02-DFA0A04FC94B}">
+                <ma14:wrappingTextBoxFlag xmlns:ma14="http://schemas.microsoft.com/office/mac/drawingml/2011/main" xmlns:a14="http://schemas.microsoft.com/office/drawing/2010/main" xmlns:m="http://schemas.openxmlformats.org/officeDocument/2006/math" xmlns="" val="1"/>
               </a:ext>
             </a:extLst>
-          </p:cNvPr>
-          <p:cNvSpPr/>
-          <p:nvPr/>
-        </p:nvSpPr>
-        <p:spPr>
-          <a:xfrm>
-            <a:off x="3946184" y="3178843"/>
-            <a:ext cx="278607" cy="278607"/>
-          </a:xfrm>
-          <a:prstGeom prst="ellipse">
-            <a:avLst/>
-          </a:prstGeom>
-          <a:solidFill>
-            <a:schemeClr val="accent1">
-              <a:lumOff val="-13575"/>
-            </a:schemeClr>
-          </a:solidFill>
-          <a:ln w="12700" cap="flat">
+          </p:spPr>
+          <p:txBody>
+            <a:bodyPr wrap="none" lIns="35719" tIns="35719" rIns="35719" bIns="35719" numCol="1" anchor="ctr">
+              <a:spAutoFit/>
+            </a:bodyPr>
+            <a:lstStyle>
+              <a:lvl1pPr>
+                <a:defRPr sz="1800"/>
+              </a:lvl1pPr>
+            </a:lstStyle>
+            <a:p>
+              <a:r>
+                <a:rPr lang="en-US" sz="1266" dirty="0"/>
+                <a:t>Ops-Workflow</a:t>
+              </a:r>
+              <a:r>
+                <a:rPr sz="1266" dirty="0"/>
+                <a:t> Management</a:t>
+              </a:r>
+            </a:p>
+          </p:txBody>
+        </p:sp>
+        <p:sp>
+          <p:nvSpPr>
+            <p:cNvPr id="31" name="Circle">
+              <a:extLst>
+                <a:ext uri="{FF2B5EF4-FFF2-40B4-BE49-F238E27FC236}">
+                  <a16:creationId xmlns:a16="http://schemas.microsoft.com/office/drawing/2014/main" id="{EB725876-4F35-C8FB-3139-9639EA699971}"/>
+                </a:ext>
+              </a:extLst>
+            </p:cNvPr>
+            <p:cNvSpPr/>
+            <p:nvPr/>
+          </p:nvSpPr>
+          <p:spPr>
+            <a:xfrm>
+              <a:off x="2869105" y="3936318"/>
+              <a:ext cx="278607" cy="278607"/>
+            </a:xfrm>
+            <a:prstGeom prst="ellipse">
+              <a:avLst/>
+            </a:prstGeom>
+            <a:solidFill>
+              <a:schemeClr val="accent1">
+                <a:lumOff val="-13575"/>
+              </a:schemeClr>
+            </a:solidFill>
+            <a:ln w="12700" cap="flat">
+              <a:noFill/>
+              <a:miter lim="400000"/>
+            </a:ln>
+            <a:effectLst/>
+          </p:spPr>
+          <p:txBody>
+            <a:bodyPr wrap="square" lIns="35719" tIns="35719" rIns="35719" bIns="35719" numCol="1" anchor="ctr">
+              <a:noAutofit/>
+            </a:bodyPr>
+            <a:lstStyle/>
+            <a:p>
+              <a:pPr>
+                <a:defRPr sz="2200" b="0">
+                  <a:solidFill>
+                    <a:srgbClr val="FFFFFF"/>
+                  </a:solidFill>
+                  <a:latin typeface="+mn-lt"/>
+                  <a:ea typeface="+mn-ea"/>
+                  <a:cs typeface="+mn-cs"/>
+                  <a:sym typeface="Helvetica Neue Medium"/>
+                </a:defRPr>
+              </a:pPr>
+              <a:endParaRPr sz="1547"/>
+            </a:p>
+          </p:txBody>
+        </p:sp>
+        <p:sp>
+          <p:nvSpPr>
+            <p:cNvPr id="32" name="Change Management">
+              <a:extLst>
+                <a:ext uri="{FF2B5EF4-FFF2-40B4-BE49-F238E27FC236}">
+                  <a16:creationId xmlns:a16="http://schemas.microsoft.com/office/drawing/2014/main" id="{02B9B3DA-2D88-D9EC-BF26-85634FBBF65D}"/>
+                </a:ext>
+              </a:extLst>
+            </p:cNvPr>
+            <p:cNvSpPr txBox="1"/>
+            <p:nvPr/>
+          </p:nvSpPr>
+          <p:spPr>
+            <a:xfrm>
+              <a:off x="3114689" y="4086264"/>
+              <a:ext cx="2122377" cy="266933"/>
+            </a:xfrm>
+            <a:prstGeom prst="rect">
+              <a:avLst/>
+            </a:prstGeom>
             <a:noFill/>
-            <a:miter lim="400000"/>
-          </a:ln>
-          <a:effectLst/>
-        </p:spPr>
-        <p:txBody>
-          <a:bodyPr wrap="square" lIns="35719" tIns="35719" rIns="35719" bIns="35719" numCol="1" anchor="ctr">
-            <a:noAutofit/>
-          </a:bodyPr>
-          <a:lstStyle/>
-          <a:p>
-            <a:pPr>
-              <a:defRPr sz="2200" b="0">
-                <a:solidFill>
-                  <a:srgbClr val="FFFFFF"/>
-                </a:solidFill>
-                <a:latin typeface="+mn-lt"/>
-                <a:ea typeface="+mn-ea"/>
-                <a:cs typeface="+mn-cs"/>
-                <a:sym typeface="Helvetica Neue Medium"/>
-              </a:defRPr>
-            </a:pPr>
-            <a:endParaRPr sz="1547"/>
-          </a:p>
-        </p:txBody>
-      </p:sp>
-      <p:sp>
-        <p:nvSpPr>
-          <p:cNvPr id="34" name="Change Management">
+            <a:ln w="12700" cap="flat">
+              <a:noFill/>
+              <a:miter lim="400000"/>
+            </a:ln>
+            <a:effectLst/>
             <a:extLst>
-              <a:ext uri="{FF2B5EF4-FFF2-40B4-BE49-F238E27FC236}">
-                <a16:creationId xmlns:a16="http://schemas.microsoft.com/office/drawing/2014/main" id="{C455A972-24A6-8AB3-A28E-044C8148A735}"/>
+              <a:ext uri="{C572A759-6A51-4108-AA02-DFA0A04FC94B}">
+                <ma14:wrappingTextBoxFlag xmlns:ma14="http://schemas.microsoft.com/office/mac/drawingml/2011/main" xmlns:a14="http://schemas.microsoft.com/office/drawing/2010/main" xmlns:m="http://schemas.openxmlformats.org/officeDocument/2006/math" xmlns="" val="1"/>
               </a:ext>
             </a:extLst>
-          </p:cNvPr>
-          <p:cNvSpPr txBox="1"/>
-          <p:nvPr/>
-        </p:nvSpPr>
-        <p:spPr>
-          <a:xfrm>
-            <a:off x="4191768" y="3328789"/>
-            <a:ext cx="1663533" cy="266933"/>
-          </a:xfrm>
-          <a:prstGeom prst="rect">
-            <a:avLst/>
-          </a:prstGeom>
-          <a:noFill/>
-          <a:ln w="12700" cap="flat">
+          </p:spPr>
+          <p:txBody>
+            <a:bodyPr wrap="none" lIns="35719" tIns="35719" rIns="35719" bIns="35719" numCol="1" anchor="ctr">
+              <a:spAutoFit/>
+            </a:bodyPr>
+            <a:lstStyle>
+              <a:lvl1pPr>
+                <a:defRPr sz="1800"/>
+              </a:lvl1pPr>
+            </a:lstStyle>
+            <a:p>
+              <a:r>
+                <a:rPr lang="en-US" sz="1266" dirty="0"/>
+                <a:t>Cable/Network </a:t>
+              </a:r>
+              <a:r>
+                <a:rPr sz="1266" dirty="0"/>
+                <a:t>Management</a:t>
+              </a:r>
+            </a:p>
+          </p:txBody>
+        </p:sp>
+        <p:sp>
+          <p:nvSpPr>
+            <p:cNvPr id="33" name="Circle">
+              <a:extLst>
+                <a:ext uri="{FF2B5EF4-FFF2-40B4-BE49-F238E27FC236}">
+                  <a16:creationId xmlns:a16="http://schemas.microsoft.com/office/drawing/2014/main" id="{AFA1A323-C279-62F1-A16F-214DF194514D}"/>
+                </a:ext>
+              </a:extLst>
+            </p:cNvPr>
+            <p:cNvSpPr/>
+            <p:nvPr/>
+          </p:nvSpPr>
+          <p:spPr>
+            <a:xfrm>
+              <a:off x="3946184" y="3178843"/>
+              <a:ext cx="278607" cy="278607"/>
+            </a:xfrm>
+            <a:prstGeom prst="ellipse">
+              <a:avLst/>
+            </a:prstGeom>
+            <a:solidFill>
+              <a:schemeClr val="accent1">
+                <a:lumOff val="-13575"/>
+              </a:schemeClr>
+            </a:solidFill>
+            <a:ln w="12700" cap="flat">
+              <a:noFill/>
+              <a:miter lim="400000"/>
+            </a:ln>
+            <a:effectLst/>
+          </p:spPr>
+          <p:txBody>
+            <a:bodyPr wrap="square" lIns="35719" tIns="35719" rIns="35719" bIns="35719" numCol="1" anchor="ctr">
+              <a:noAutofit/>
+            </a:bodyPr>
+            <a:lstStyle/>
+            <a:p>
+              <a:pPr>
+                <a:defRPr sz="2200" b="0">
+                  <a:solidFill>
+                    <a:srgbClr val="FFFFFF"/>
+                  </a:solidFill>
+                  <a:latin typeface="+mn-lt"/>
+                  <a:ea typeface="+mn-ea"/>
+                  <a:cs typeface="+mn-cs"/>
+                  <a:sym typeface="Helvetica Neue Medium"/>
+                </a:defRPr>
+              </a:pPr>
+              <a:endParaRPr sz="1547"/>
+            </a:p>
+          </p:txBody>
+        </p:sp>
+        <p:sp>
+          <p:nvSpPr>
+            <p:cNvPr id="34" name="Change Management">
+              <a:extLst>
+                <a:ext uri="{FF2B5EF4-FFF2-40B4-BE49-F238E27FC236}">
+                  <a16:creationId xmlns:a16="http://schemas.microsoft.com/office/drawing/2014/main" id="{C455A972-24A6-8AB3-A28E-044C8148A735}"/>
+                </a:ext>
+              </a:extLst>
+            </p:cNvPr>
+            <p:cNvSpPr txBox="1"/>
+            <p:nvPr/>
+          </p:nvSpPr>
+          <p:spPr>
+            <a:xfrm>
+              <a:off x="4191768" y="3328789"/>
+              <a:ext cx="1663533" cy="266933"/>
+            </a:xfrm>
+            <a:prstGeom prst="rect">
+              <a:avLst/>
+            </a:prstGeom>
             <a:noFill/>
-            <a:miter lim="400000"/>
-          </a:ln>
-          <a:effectLst/>
-          <a:extLst>
-            <a:ext uri="{C572A759-6A51-4108-AA02-DFA0A04FC94B}">
-              <ma14:wrappingTextBoxFlag xmlns="" xmlns:m="http://schemas.openxmlformats.org/officeDocument/2006/math" xmlns:a14="http://schemas.microsoft.com/office/drawing/2010/main" xmlns:ma14="http://schemas.microsoft.com/office/mac/drawingml/2011/main" val="1"/>
-            </a:ext>
-          </a:extLst>
-        </p:spPr>
-        <p:txBody>
-          <a:bodyPr wrap="none" lIns="35719" tIns="35719" rIns="35719" bIns="35719" numCol="1" anchor="ctr">
-            <a:spAutoFit/>
-          </a:bodyPr>
-          <a:lstStyle>
-            <a:lvl1pPr>
-              <a:defRPr sz="1800"/>
-            </a:lvl1pPr>
-          </a:lstStyle>
-          <a:p>
-            <a:r>
-              <a:rPr lang="en-US" sz="1266" dirty="0"/>
-              <a:t>Tenancy </a:t>
-            </a:r>
-            <a:r>
-              <a:rPr sz="1266" dirty="0"/>
-              <a:t>Management</a:t>
-            </a:r>
-          </a:p>
-        </p:txBody>
-      </p:sp>
-      <p:sp>
-        <p:nvSpPr>
-          <p:cNvPr id="35" name="Circle">
+            <a:ln w="12700" cap="flat">
+              <a:noFill/>
+              <a:miter lim="400000"/>
+            </a:ln>
+            <a:effectLst/>
             <a:extLst>
-              <a:ext uri="{FF2B5EF4-FFF2-40B4-BE49-F238E27FC236}">
-                <a16:creationId xmlns:a16="http://schemas.microsoft.com/office/drawing/2014/main" id="{5FAE3C43-3618-274F-C741-76B74C67442B}"/>
+              <a:ext uri="{C572A759-6A51-4108-AA02-DFA0A04FC94B}">
+                <ma14:wrappingTextBoxFlag xmlns:ma14="http://schemas.microsoft.com/office/mac/drawingml/2011/main" xmlns:a14="http://schemas.microsoft.com/office/drawing/2010/main" xmlns:m="http://schemas.openxmlformats.org/officeDocument/2006/math" xmlns="" val="1"/>
               </a:ext>
             </a:extLst>
-          </p:cNvPr>
-          <p:cNvSpPr/>
-          <p:nvPr/>
-        </p:nvSpPr>
-        <p:spPr>
-          <a:xfrm>
-            <a:off x="4357647" y="2967935"/>
-            <a:ext cx="278607" cy="278607"/>
-          </a:xfrm>
-          <a:prstGeom prst="ellipse">
-            <a:avLst/>
-          </a:prstGeom>
-          <a:solidFill>
-            <a:schemeClr val="accent1">
-              <a:lumOff val="-13575"/>
-            </a:schemeClr>
-          </a:solidFill>
-          <a:ln w="12700" cap="flat">
+          </p:spPr>
+          <p:txBody>
+            <a:bodyPr wrap="none" lIns="35719" tIns="35719" rIns="35719" bIns="35719" numCol="1" anchor="ctr">
+              <a:spAutoFit/>
+            </a:bodyPr>
+            <a:lstStyle>
+              <a:lvl1pPr>
+                <a:defRPr sz="1800"/>
+              </a:lvl1pPr>
+            </a:lstStyle>
+            <a:p>
+              <a:r>
+                <a:rPr lang="en-US" sz="1266" dirty="0"/>
+                <a:t>Tenancy </a:t>
+              </a:r>
+              <a:r>
+                <a:rPr sz="1266" dirty="0"/>
+                <a:t>Management</a:t>
+              </a:r>
+            </a:p>
+          </p:txBody>
+        </p:sp>
+        <p:sp>
+          <p:nvSpPr>
+            <p:cNvPr id="35" name="Circle">
+              <a:extLst>
+                <a:ext uri="{FF2B5EF4-FFF2-40B4-BE49-F238E27FC236}">
+                  <a16:creationId xmlns:a16="http://schemas.microsoft.com/office/drawing/2014/main" id="{5FAE3C43-3618-274F-C741-76B74C67442B}"/>
+                </a:ext>
+              </a:extLst>
+            </p:cNvPr>
+            <p:cNvSpPr/>
+            <p:nvPr/>
+          </p:nvSpPr>
+          <p:spPr>
+            <a:xfrm>
+              <a:off x="4357647" y="2967935"/>
+              <a:ext cx="278607" cy="278607"/>
+            </a:xfrm>
+            <a:prstGeom prst="ellipse">
+              <a:avLst/>
+            </a:prstGeom>
+            <a:solidFill>
+              <a:schemeClr val="accent1">
+                <a:lumOff val="-13575"/>
+              </a:schemeClr>
+            </a:solidFill>
+            <a:ln w="12700" cap="flat">
+              <a:noFill/>
+              <a:miter lim="400000"/>
+            </a:ln>
+            <a:effectLst/>
+          </p:spPr>
+          <p:txBody>
+            <a:bodyPr wrap="square" lIns="35719" tIns="35719" rIns="35719" bIns="35719" numCol="1" anchor="ctr">
+              <a:noAutofit/>
+            </a:bodyPr>
+            <a:lstStyle/>
+            <a:p>
+              <a:pPr>
+                <a:defRPr sz="2200" b="0">
+                  <a:solidFill>
+                    <a:srgbClr val="FFFFFF"/>
+                  </a:solidFill>
+                  <a:latin typeface="+mn-lt"/>
+                  <a:ea typeface="+mn-ea"/>
+                  <a:cs typeface="+mn-cs"/>
+                  <a:sym typeface="Helvetica Neue Medium"/>
+                </a:defRPr>
+              </a:pPr>
+              <a:endParaRPr sz="1547"/>
+            </a:p>
+          </p:txBody>
+        </p:sp>
+        <p:sp>
+          <p:nvSpPr>
+            <p:cNvPr id="36" name="Change Management">
+              <a:extLst>
+                <a:ext uri="{FF2B5EF4-FFF2-40B4-BE49-F238E27FC236}">
+                  <a16:creationId xmlns:a16="http://schemas.microsoft.com/office/drawing/2014/main" id="{069EADCB-5D42-A9D7-1A0D-565044C86EC5}"/>
+                </a:ext>
+              </a:extLst>
+            </p:cNvPr>
+            <p:cNvSpPr txBox="1"/>
+            <p:nvPr/>
+          </p:nvSpPr>
+          <p:spPr>
+            <a:xfrm>
+              <a:off x="4603231" y="3117881"/>
+              <a:ext cx="1712008" cy="266933"/>
+            </a:xfrm>
+            <a:prstGeom prst="rect">
+              <a:avLst/>
+            </a:prstGeom>
             <a:noFill/>
-            <a:miter lim="400000"/>
-          </a:ln>
-          <a:effectLst/>
-        </p:spPr>
-        <p:txBody>
-          <a:bodyPr wrap="square" lIns="35719" tIns="35719" rIns="35719" bIns="35719" numCol="1" anchor="ctr">
-            <a:noAutofit/>
-          </a:bodyPr>
-          <a:lstStyle/>
-          <a:p>
-            <a:pPr>
-              <a:defRPr sz="2200" b="0">
-                <a:solidFill>
-                  <a:srgbClr val="FFFFFF"/>
-                </a:solidFill>
-                <a:latin typeface="+mn-lt"/>
-                <a:ea typeface="+mn-ea"/>
-                <a:cs typeface="+mn-cs"/>
-                <a:sym typeface="Helvetica Neue Medium"/>
-              </a:defRPr>
-            </a:pPr>
-            <a:endParaRPr sz="1547"/>
-          </a:p>
-        </p:txBody>
-      </p:sp>
-      <p:sp>
-        <p:nvSpPr>
-          <p:cNvPr id="36" name="Change Management">
+            <a:ln w="12700" cap="flat">
+              <a:noFill/>
+              <a:miter lim="400000"/>
+            </a:ln>
+            <a:effectLst/>
             <a:extLst>
-              <a:ext uri="{FF2B5EF4-FFF2-40B4-BE49-F238E27FC236}">
-                <a16:creationId xmlns:a16="http://schemas.microsoft.com/office/drawing/2014/main" id="{069EADCB-5D42-A9D7-1A0D-565044C86EC5}"/>
+              <a:ext uri="{C572A759-6A51-4108-AA02-DFA0A04FC94B}">
+                <ma14:wrappingTextBoxFlag xmlns:ma14="http://schemas.microsoft.com/office/mac/drawingml/2011/main" xmlns:a14="http://schemas.microsoft.com/office/drawing/2010/main" xmlns:m="http://schemas.openxmlformats.org/officeDocument/2006/math" xmlns="" val="1"/>
               </a:ext>
             </a:extLst>
-          </p:cNvPr>
-          <p:cNvSpPr txBox="1"/>
-          <p:nvPr/>
-        </p:nvSpPr>
-        <p:spPr>
-          <a:xfrm>
-            <a:off x="4603231" y="3117881"/>
-            <a:ext cx="1712008" cy="266933"/>
-          </a:xfrm>
-          <a:prstGeom prst="rect">
-            <a:avLst/>
-          </a:prstGeom>
-          <a:noFill/>
-          <a:ln w="12700" cap="flat">
-            <a:noFill/>
-            <a:miter lim="400000"/>
-          </a:ln>
-          <a:effectLst/>
-          <a:extLst>
-            <a:ext uri="{C572A759-6A51-4108-AA02-DFA0A04FC94B}">
-              <ma14:wrappingTextBoxFlag xmlns="" xmlns:m="http://schemas.openxmlformats.org/officeDocument/2006/math" xmlns:a14="http://schemas.microsoft.com/office/drawing/2010/main" xmlns:ma14="http://schemas.microsoft.com/office/mac/drawingml/2011/main" val="1"/>
-            </a:ext>
-          </a:extLst>
-        </p:spPr>
-        <p:txBody>
-          <a:bodyPr wrap="none" lIns="35719" tIns="35719" rIns="35719" bIns="35719" numCol="1" anchor="ctr">
-            <a:spAutoFit/>
-          </a:bodyPr>
-          <a:lstStyle>
-            <a:lvl1pPr>
-              <a:defRPr sz="1800"/>
-            </a:lvl1pPr>
-          </a:lstStyle>
-          <a:p>
-            <a:r>
-              <a:rPr lang="en-US" sz="1266" dirty="0"/>
-              <a:t>Analytics </a:t>
-            </a:r>
-            <a:r>
-              <a:rPr sz="1266" dirty="0"/>
-              <a:t>Management</a:t>
-            </a:r>
-          </a:p>
-        </p:txBody>
-      </p:sp>
+          </p:spPr>
+          <p:txBody>
+            <a:bodyPr wrap="none" lIns="35719" tIns="35719" rIns="35719" bIns="35719" numCol="1" anchor="ctr">
+              <a:spAutoFit/>
+            </a:bodyPr>
+            <a:lstStyle>
+              <a:lvl1pPr>
+                <a:defRPr sz="1800"/>
+              </a:lvl1pPr>
+            </a:lstStyle>
+            <a:p>
+              <a:r>
+                <a:rPr lang="en-US" sz="1266" dirty="0"/>
+                <a:t>Analytics </a:t>
+              </a:r>
+              <a:r>
+                <a:rPr sz="1266" dirty="0"/>
+                <a:t>Management</a:t>
+              </a:r>
+            </a:p>
+          </p:txBody>
+        </p:sp>
+      </p:grpSp>
     </p:spTree>
     <p:extLst>
       <p:ext uri="{BB962C8B-B14F-4D97-AF65-F5344CB8AC3E}">
@@ -29674,19 +29705,20 @@
                             </p:stCondLst>
                             <p:childTnLst>
                               <p:par>
-                                <p:cTn id="21" presetID="9" presetClass="entr" fill="hold" grpId="0" nodeType="clickEffect">
+                                <p:cTn id="21" presetID="42" presetClass="entr" presetSubtype="0" fill="hold" nodeType="clickEffect">
                                   <p:stCondLst>
                                     <p:cond delay="0"/>
                                   </p:stCondLst>
-                                  <p:iterate>
-                                    <p:tmAbs val="0"/>
-                                  </p:iterate>
                                   <p:childTnLst>
                                     <p:set>
                                       <p:cBhvr>
-                                        <p:cTn id="22" fill="hold"/>
+                                        <p:cTn id="22" dur="1" fill="hold">
+                                          <p:stCondLst>
+                                            <p:cond delay="0"/>
+                                          </p:stCondLst>
+                                        </p:cTn>
                                         <p:tgtEl>
-                                          <p:spTgt spid="29"/>
+                                          <p:spTgt spid="18"/>
                                         </p:tgtEl>
                                         <p:attrNameLst>
                                           <p:attrName>style.visibility</p:attrName>
@@ -29696,14 +29728,60 @@
                                         <p:strVal val="visible"/>
                                       </p:to>
                                     </p:set>
-                                    <p:animEffect transition="in" filter="dissolve">
+                                    <p:animEffect transition="in" filter="fade">
                                       <p:cBhvr>
-                                        <p:cTn id="23" dur="800"/>
+                                        <p:cTn id="23" dur="1000"/>
                                         <p:tgtEl>
-                                          <p:spTgt spid="29"/>
+                                          <p:spTgt spid="18"/>
                                         </p:tgtEl>
                                       </p:cBhvr>
                                     </p:animEffect>
+                                    <p:anim calcmode="lin" valueType="num">
+                                      <p:cBhvr>
+                                        <p:cTn id="24" dur="1000" fill="hold"/>
+                                        <p:tgtEl>
+                                          <p:spTgt spid="18"/>
+                                        </p:tgtEl>
+                                        <p:attrNameLst>
+                                          <p:attrName>ppt_x</p:attrName>
+                                        </p:attrNameLst>
+                                      </p:cBhvr>
+                                      <p:tavLst>
+                                        <p:tav tm="0">
+                                          <p:val>
+                                            <p:strVal val="#ppt_x"/>
+                                          </p:val>
+                                        </p:tav>
+                                        <p:tav tm="100000">
+                                          <p:val>
+                                            <p:strVal val="#ppt_x"/>
+                                          </p:val>
+                                        </p:tav>
+                                      </p:tavLst>
+                                    </p:anim>
+                                    <p:anim calcmode="lin" valueType="num">
+                                      <p:cBhvr>
+                                        <p:cTn id="25" dur="1000" fill="hold"/>
+                                        <p:tgtEl>
+                                          <p:spTgt spid="18"/>
+                                        </p:tgtEl>
+                                        <p:attrNameLst>
+                                          <p:attrName>ppt_y</p:attrName>
+                                        </p:attrNameLst>
+                                      </p:cBhvr>
+                                      <p:tavLst>
+                                        <p:tav tm="0">
+                                          <p:val>
+                                            <p:strVal val="#ppt_y+.1"/>
+                                          </p:val>
+                                        </p:tav>
+                                        <p:tav tm="100000">
+                                          <p:val>
+                                            <p:strVal val="#ppt_y"/>
+                                          </p:val>
+                                        </p:tav>
+                                      </p:tavLst>
+                                    </p:anim>
                                   </p:childTnLst>
                                 </p:cTn>
                               </p:par>
@@ -29714,26 +29792,26 @@
                     </p:cTn>
                   </p:par>
                   <p:par>
-                    <p:cTn id="24" fill="hold">
+                    <p:cTn id="26" fill="hold">
                       <p:stCondLst>
                         <p:cond delay="indefinite"/>
                       </p:stCondLst>
                       <p:childTnLst>
                         <p:par>
-                          <p:cTn id="25" fill="hold">
+                          <p:cTn id="27" fill="hold">
                             <p:stCondLst>
                               <p:cond delay="0"/>
                             </p:stCondLst>
                             <p:childTnLst>
                               <p:par>
-                                <p:cTn id="26" presetID="9" presetClass="entr" presetSubtype="0" fill="hold" nodeType="clickEffect">
+                                <p:cTn id="28" presetID="9" presetClass="entr" presetSubtype="0" fill="hold" nodeType="clickEffect">
                                   <p:stCondLst>
                                     <p:cond delay="0"/>
                                   </p:stCondLst>
                                   <p:childTnLst>
                                     <p:set>
                                       <p:cBhvr>
-                                        <p:cTn id="27" dur="1" fill="hold">
+                                        <p:cTn id="29" dur="1" fill="hold">
                                           <p:stCondLst>
                                             <p:cond delay="0"/>
                                           </p:stCondLst>
@@ -29751,7 +29829,7 @@
                                     </p:set>
                                     <p:animEffect transition="in" filter="dissolve">
                                       <p:cBhvr>
-                                        <p:cTn id="28" dur="500"/>
+                                        <p:cTn id="30" dur="500"/>
                                         <p:tgtEl>
                                           <p:spTgt spid="11"/>
                                         </p:tgtEl>
@@ -29767,19 +29845,19 @@
                     </p:cTn>
                   </p:par>
                   <p:par>
-                    <p:cTn id="29" fill="hold">
+                    <p:cTn id="31" fill="hold">
                       <p:stCondLst>
                         <p:cond delay="indefinite"/>
                       </p:stCondLst>
                       <p:childTnLst>
                         <p:par>
-                          <p:cTn id="30" fill="hold">
+                          <p:cTn id="32" fill="hold">
                             <p:stCondLst>
                               <p:cond delay="0"/>
                             </p:stCondLst>
                             <p:childTnLst>
                               <p:par>
-                                <p:cTn id="31" presetID="22" presetClass="entr" presetSubtype="8" fill="hold" grpId="0" nodeType="clickEffect">
+                                <p:cTn id="33" presetID="9" presetClass="entr" fill="hold" grpId="0" nodeType="clickEffect">
                                   <p:stCondLst>
                                     <p:cond delay="0"/>
                                   </p:stCondLst>
@@ -29789,7 +29867,59 @@
                                   <p:childTnLst>
                                     <p:set>
                                       <p:cBhvr>
-                                        <p:cTn id="32" fill="hold"/>
+                                        <p:cTn id="34" fill="hold"/>
+                                        <p:tgtEl>
+                                          <p:spTgt spid="29"/>
+                                        </p:tgtEl>
+                                        <p:attrNameLst>
+                                          <p:attrName>style.visibility</p:attrName>
+                                        </p:attrNameLst>
+                                      </p:cBhvr>
+                                      <p:to>
+                                        <p:strVal val="visible"/>
+                                      </p:to>
+                                    </p:set>
+                                    <p:animEffect transition="in" filter="dissolve">
+                                      <p:cBhvr>
+                                        <p:cTn id="35" dur="800"/>
+                                        <p:tgtEl>
+                                          <p:spTgt spid="29"/>
+                                        </p:tgtEl>
+                                      </p:cBhvr>
+                                    </p:animEffect>
+                                  </p:childTnLst>
+                                </p:cTn>
+                              </p:par>
+                            </p:childTnLst>
+                          </p:cTn>
+                        </p:par>
+                      </p:childTnLst>
+                    </p:cTn>
+                  </p:par>
+                  <p:par>
+                    <p:cTn id="36" fill="hold">
+                      <p:stCondLst>
+                        <p:cond delay="indefinite"/>
+                      </p:stCondLst>
+                      <p:childTnLst>
+                        <p:par>
+                          <p:cTn id="37" fill="hold">
+                            <p:stCondLst>
+                              <p:cond delay="0"/>
+                            </p:stCondLst>
+                            <p:childTnLst>
+                              <p:par>
+                                <p:cTn id="38" presetID="22" presetClass="entr" presetSubtype="8" fill="hold" grpId="0" nodeType="clickEffect">
+                                  <p:stCondLst>
+                                    <p:cond delay="0"/>
+                                  </p:stCondLst>
+                                  <p:iterate>
+                                    <p:tmAbs val="0"/>
+                                  </p:iterate>
+                                  <p:childTnLst>
+                                    <p:set>
+                                      <p:cBhvr>
+                                        <p:cTn id="39" fill="hold"/>
                                         <p:tgtEl>
                                           <p:spTgt spid="14"/>
                                         </p:tgtEl>
@@ -29803,7 +29933,7 @@
                                     </p:set>
                                     <p:animEffect transition="in" filter="wipe(left)">
                                       <p:cBhvr>
-                                        <p:cTn id="33" dur="1000"/>
+                                        <p:cTn id="40" dur="1000"/>
                                         <p:tgtEl>
                                           <p:spTgt spid="14"/>
                                         </p:tgtEl>
@@ -29819,19 +29949,19 @@
                     </p:cTn>
                   </p:par>
                   <p:par>
-                    <p:cTn id="34" fill="hold">
+                    <p:cTn id="41" fill="hold">
                       <p:stCondLst>
                         <p:cond delay="indefinite"/>
                       </p:stCondLst>
                       <p:childTnLst>
                         <p:par>
-                          <p:cTn id="35" fill="hold">
+                          <p:cTn id="42" fill="hold">
                             <p:stCondLst>
                               <p:cond delay="0"/>
                             </p:stCondLst>
                             <p:childTnLst>
                               <p:par>
-                                <p:cTn id="36" presetID="9" presetClass="entr" fill="hold" grpId="0" nodeType="clickEffect">
+                                <p:cTn id="43" presetID="9" presetClass="entr" fill="hold" grpId="0" nodeType="clickEffect">
                                   <p:stCondLst>
                                     <p:cond delay="0"/>
                                   </p:stCondLst>
@@ -29841,7 +29971,7 @@
                                   <p:childTnLst>
                                     <p:set>
                                       <p:cBhvr>
-                                        <p:cTn id="37" fill="hold"/>
+                                        <p:cTn id="44" fill="hold"/>
                                         <p:tgtEl>
                                           <p:spTgt spid="28"/>
                                         </p:tgtEl>
@@ -29855,7 +29985,7 @@
                                     </p:set>
                                     <p:animEffect transition="in" filter="dissolve">
                                       <p:cBhvr>
-                                        <p:cTn id="38" dur="800"/>
+                                        <p:cTn id="45" dur="800"/>
                                         <p:tgtEl>
                                           <p:spTgt spid="28"/>
                                         </p:tgtEl>
@@ -30007,13 +30137,13 @@
         </p:nvSpPr>
         <p:spPr>
           <a:xfrm>
-            <a:off x="461609" y="851036"/>
-            <a:ext cx="3699841" cy="1715256"/>
+            <a:off x="461609" y="795718"/>
+            <a:ext cx="3957991" cy="1715256"/>
           </a:xfrm>
         </p:spPr>
         <p:txBody>
           <a:bodyPr>
-            <a:normAutofit fontScale="85000" lnSpcReduction="20000"/>
+            <a:normAutofit fontScale="85000" lnSpcReduction="10000"/>
           </a:bodyPr>
           <a:lstStyle/>
           <a:p>
@@ -34961,7 +35091,7 @@
                   </a:schemeClr>
                 </a:solidFill>
               </a:rPr>
-              <a:t>Technology Adoption by Functional-Area and User-Role</a:t>
+              <a:t>Technology Adoption by Capability-Area and User-Role</a:t>
             </a:r>
             <a:endParaRPr lang="en-US" sz="1800" dirty="0">
               <a:solidFill>
@@ -38025,8 +38155,8 @@
         </p:nvSpPr>
         <p:spPr>
           <a:xfrm>
-            <a:off x="800100" y="238321"/>
-            <a:ext cx="7543800" cy="500849"/>
+            <a:off x="666750" y="182203"/>
+            <a:ext cx="7810500" cy="500849"/>
           </a:xfrm>
           <a:prstGeom prst="rect">
             <a:avLst/>
@@ -38063,7 +38193,7 @@
                   <a:schemeClr val="tx2"/>
                 </a:solidFill>
               </a:rPr>
-              <a:t>Example:  Power Manager – Constrain Cabinets</a:t>
+              <a:t>Example:  Power Manager – Constrain Cabinet Space</a:t>
             </a:r>
             <a:endParaRPr lang="en-US" sz="2400" dirty="0">
               <a:solidFill>
@@ -38710,7 +38840,7 @@
                   </a:schemeClr>
                 </a:solidFill>
               </a:rPr>
-              <a:t>Technology Adoption by Functional Area</a:t>
+              <a:t>Technology Adoption by Capability Area</a:t>
             </a:r>
             <a:endParaRPr lang="en-US" sz="1800" dirty="0">
               <a:solidFill>
@@ -39882,7 +40012,7 @@
 </file>
 
 <file path=customXml/itemProps1.xml><?xml version="1.0" encoding="utf-8"?>
-<ds:datastoreItem xmlns:ds="http://schemas.openxmlformats.org/officeDocument/2006/customXml" ds:itemID="{65868B19-9E83-4BD5-873F-5C7984EFC428}">
+<ds:datastoreItem xmlns:ds="http://schemas.openxmlformats.org/officeDocument/2006/customXml" ds:itemID="{D266753A-28ED-43AE-91E2-FDC6258164F0}">
   <ds:schemaRefs>
     <ds:schemaRef ds:uri="http://schemas.microsoft.com/VisualStudio/2011/storyboarding/control"/>
   </ds:schemaRefs>
@@ -39890,7 +40020,7 @@
 </file>
 
 <file path=customXml/itemProps2.xml><?xml version="1.0" encoding="utf-8"?>
-<ds:datastoreItem xmlns:ds="http://schemas.openxmlformats.org/officeDocument/2006/customXml" ds:itemID="{D266753A-28ED-43AE-91E2-FDC6258164F0}">
+<ds:datastoreItem xmlns:ds="http://schemas.openxmlformats.org/officeDocument/2006/customXml" ds:itemID="{65868B19-9E83-4BD5-873F-5C7984EFC428}">
   <ds:schemaRefs>
     <ds:schemaRef ds:uri="http://schemas.microsoft.com/VisualStudio/2011/storyboarding/control"/>
   </ds:schemaRefs>
